--- a/Internship_Defense.pptx
+++ b/Internship_Defense.pptx
@@ -18,10 +18,9 @@
     <p:sldId id="266" r:id="rId12"/>
     <p:sldId id="267" r:id="rId13"/>
     <p:sldId id="268" r:id="rId14"/>
-    <p:sldId id="269" r:id="rId15"/>
   </p:sldIdLst>
   <p:notesMasterIdLst>
-    <p:notesMasterId r:id="rId16"/>
+    <p:notesMasterId r:id="rId15"/>
   </p:notesMasterIdLst>
   <p:sldSz cx="12192000" cy="6858000"/>
   <p:notesSz cx="6858000" cy="12192000"/>
@@ -891,94 +890,6 @@
             <a:fld id="{F7021451-1387-4CA6-816F-3879F97B5CBC}" type="slidenum">
               <a:rPr lang="en-US"/>
               <a:t>13</a:t>
-            </a:fld>
-            <a:endParaRPr lang="en-US"/>
-          </a:p>
-        </p:txBody>
-      </p:sp>
-    </p:spTree>
-    <p:extLst>
-      <p:ext uri="{BB962C8B-B14F-4D97-AF65-F5344CB8AC3E}">
-        <p14:creationId xmlns:p14="http://schemas.microsoft.com/office/powerpoint/2010/main" val="1024086991"/>
-      </p:ext>
-    </p:extLst>
-  </p:cSld>
-  <p:clrMapOvr>
-    <a:masterClrMapping/>
-  </p:clrMapOvr>
-</p:notes>
-</file>
-
-<file path=ppt/notesSlides/notesSlide14.xml><?xml version="1.0" encoding="utf-8"?>
-<p:notes xmlns:a="http://schemas.openxmlformats.org/drawingml/2006/main" xmlns:r="http://schemas.openxmlformats.org/officeDocument/2006/relationships" xmlns:p="http://schemas.openxmlformats.org/presentationml/2006/main">
-  <p:cSld>
-    <p:spTree>
-      <p:nvGrpSpPr>
-        <p:cNvPr id="1" name=""/>
-        <p:cNvGrpSpPr/>
-        <p:nvPr/>
-      </p:nvGrpSpPr>
-      <p:grpSpPr>
-        <a:xfrm>
-          <a:off x="0" y="0"/>
-          <a:ext cx="0" cy="0"/>
-          <a:chOff x="0" y="0"/>
-          <a:chExt cx="0" cy="0"/>
-        </a:xfrm>
-      </p:grpSpPr>
-      <p:sp>
-        <p:nvSpPr>
-          <p:cNvPr id="2" name="Slide Image Placeholder 1"/>
-          <p:cNvSpPr>
-            <a:spLocks noGrp="1" noRot="1" noChangeAspect="1"/>
-          </p:cNvSpPr>
-          <p:nvPr>
-            <p:ph type="sldImg"/>
-          </p:nvPr>
-        </p:nvSpPr>
-        <p:spPr/>
-      </p:sp>
-      <p:sp>
-        <p:nvSpPr>
-          <p:cNvPr id="3" name="Notes Placeholder 2"/>
-          <p:cNvSpPr>
-            <a:spLocks noGrp="1"/>
-          </p:cNvSpPr>
-          <p:nvPr>
-            <p:ph type="body" idx="1"/>
-          </p:nvPr>
-        </p:nvSpPr>
-        <p:spPr/>
-        <p:txBody>
-          <a:bodyPr/>
-          <a:lstStyle/>
-          <a:p>
-            <a:r>
-              <a:rPr lang="en-US" dirty="0"/>
-              <a:t/>
-            </a:r>
-            <a:endParaRPr lang="en-US" dirty="0"/>
-          </a:p>
-        </p:txBody>
-      </p:sp>
-      <p:sp>
-        <p:nvSpPr>
-          <p:cNvPr id="4" name="Slide Number Placeholder 3"/>
-          <p:cNvSpPr>
-            <a:spLocks noGrp="1"/>
-          </p:cNvSpPr>
-          <p:nvPr>
-            <p:ph type="sldNum" sz="quarter" idx="10"/>
-          </p:nvPr>
-        </p:nvSpPr>
-        <p:spPr/>
-        <p:txBody>
-          <a:bodyPr/>
-          <a:lstStyle/>
-          <a:p>
-            <a:fld id="{F7021451-1387-4CA6-816F-3879F97B5CBC}" type="slidenum">
-              <a:rPr lang="en-US"/>
-              <a:t>14</a:t>
             </a:fld>
             <a:endParaRPr lang="en-US"/>
           </a:p>
@@ -2445,7 +2356,7 @@
                 <a:ea typeface="Calibri" pitchFamily="34" charset="-122"/>
                 <a:cs typeface="Calibri" pitchFamily="34" charset="-120"/>
               </a:rPr>
-              <a:t>THREE ITERATIONS</a:t>
+              <a:t>INTEGRATION &amp; TESTING</a:t>
             </a:r>
             <a:endParaRPr lang="en-US" sz="1300" dirty="0"/>
           </a:p>
@@ -2484,7 +2395,7 @@
                 <a:ea typeface="Cambria" pitchFamily="34" charset="-122"/>
                 <a:cs typeface="Cambria" pitchFamily="34" charset="-120"/>
               </a:rPr>
-              <a:t>Learning by narrowing the scope</a:t>
+              <a:t>Validated against real hardware</a:t>
             </a:r>
             <a:endParaRPr lang="en-US" sz="3200" dirty="0"/>
           </a:p>
@@ -2499,11 +2410,11 @@
         <p:spPr>
           <a:xfrm>
             <a:off x="640080" y="1828800"/>
-            <a:ext cx="3393338" cy="3931920"/>
+            <a:ext cx="5120640" cy="3931920"/>
           </a:xfrm>
           <a:prstGeom prst="roundRect">
             <a:avLst>
-              <a:gd name="adj" fmla="val 2156"/>
+              <a:gd name="adj" fmla="val 1860"/>
             </a:avLst>
           </a:prstGeom>
           <a:solidFill>
@@ -2514,14 +2425,58 @@
       </p:sp>
       <p:sp>
         <p:nvSpPr>
-          <p:cNvPr id="5" name="Text 3"/>
-          <p:cNvSpPr/>
-          <p:nvPr/>
-        </p:nvSpPr>
-        <p:spPr>
-          <a:xfrm>
-            <a:off x="960120" y="2057400"/>
-            <a:ext cx="2753258" cy="548640"/>
+          <p:cNvPr id="5" name="Shape 3"/>
+          <p:cNvSpPr/>
+          <p:nvPr/>
+        </p:nvSpPr>
+        <p:spPr>
+          <a:xfrm>
+            <a:off x="960120" y="2103120"/>
+            <a:ext cx="685800" cy="685800"/>
+          </a:xfrm>
+          <a:prstGeom prst="ellipse">
+            <a:avLst/>
+          </a:prstGeom>
+          <a:solidFill>
+            <a:srgbClr val="FFFFFF"/>
+          </a:solidFill>
+          <a:ln/>
+        </p:spPr>
+      </p:sp>
+      <p:pic>
+        <p:nvPicPr>
+          <p:cNvPr id="6" name="Image 0" descr="preencoded.png">    </p:cNvPr>
+          <p:cNvPicPr>
+            <a:picLocks noChangeAspect="1"/>
+          </p:cNvPicPr>
+          <p:nvPr/>
+        </p:nvPicPr>
+        <p:blipFill>
+          <a:blip r:embed="rId1"/>
+          <a:stretch>
+            <a:fillRect/>
+          </a:stretch>
+        </p:blipFill>
+        <p:spPr>
+          <a:xfrm>
+            <a:off x="1114425" y="2257425"/>
+            <a:ext cx="377190" cy="377190"/>
+          </a:xfrm>
+          <a:prstGeom prst="rect">
+            <a:avLst/>
+          </a:prstGeom>
+        </p:spPr>
+      </p:pic>
+      <p:sp>
+        <p:nvSpPr>
+          <p:cNvPr id="7" name="Text 4"/>
+          <p:cNvSpPr/>
+          <p:nvPr/>
+        </p:nvSpPr>
+        <p:spPr>
+          <a:xfrm>
+            <a:off x="1783080" y="2194560"/>
+            <a:ext cx="3840480" cy="457200"/>
           </a:xfrm>
           <a:prstGeom prst="rect">
             <a:avLst/>
@@ -2537,54 +2492,15 @@
               <a:buNone/>
             </a:pPr>
             <a:r>
-              <a:rPr lang="en-US" sz="2600" b="1" dirty="0">
-                <a:solidFill>
-                  <a:srgbClr val="5C0E2E"/>
+              <a:rPr lang="en-US" sz="1600" b="1" dirty="0">
+                <a:solidFill>
+                  <a:srgbClr val="2B2730"/>
                 </a:solidFill>
                 <a:latin typeface="Cambria" pitchFamily="34" charset="0"/>
                 <a:ea typeface="Cambria" pitchFamily="34" charset="-122"/>
                 <a:cs typeface="Cambria" pitchFamily="34" charset="-120"/>
               </a:rPr>
-              <a:t>v1</a:t>
-            </a:r>
-            <a:endParaRPr lang="en-US" sz="2600" dirty="0"/>
-          </a:p>
-        </p:txBody>
-      </p:sp>
-      <p:sp>
-        <p:nvSpPr>
-          <p:cNvPr id="6" name="Text 4"/>
-          <p:cNvSpPr/>
-          <p:nvPr/>
-        </p:nvSpPr>
-        <p:spPr>
-          <a:xfrm>
-            <a:off x="960120" y="2697480"/>
-            <a:ext cx="2753258" cy="731520"/>
-          </a:xfrm>
-          <a:prstGeom prst="rect">
-            <a:avLst/>
-          </a:prstGeom>
-          <a:noFill/>
-          <a:ln/>
-        </p:spPr>
-        <p:txBody>
-          <a:bodyPr wrap="square" lIns="0" tIns="0" rIns="0" bIns="0" rtlCol="0" anchor="ctr"/>
-          <a:lstStyle/>
-          <a:p>
-            <a:pPr indent="0" marL="0">
-              <a:buNone/>
-            </a:pPr>
-            <a:r>
-              <a:rPr lang="en-US" sz="1600" b="1" dirty="0">
-                <a:solidFill>
-                  <a:srgbClr val="2B2730"/>
-                </a:solidFill>
-                <a:latin typeface="Cambria" pitchFamily="34" charset="0"/>
-                <a:ea typeface="Cambria" pitchFamily="34" charset="-122"/>
-                <a:cs typeface="Cambria" pitchFamily="34" charset="-120"/>
-              </a:rPr>
-              <a:t>Reuse third-party program</a:t>
+              <a:t>External tester</a:t>
             </a:r>
             <a:endParaRPr lang="en-US" sz="1600" dirty="0"/>
           </a:p>
@@ -2592,14 +2508,14 @@
       </p:sp>
       <p:sp>
         <p:nvSpPr>
-          <p:cNvPr id="7" name="Text 5"/>
-          <p:cNvSpPr/>
-          <p:nvPr/>
-        </p:nvSpPr>
-        <p:spPr>
-          <a:xfrm>
-            <a:off x="960120" y="3429000"/>
-            <a:ext cx="2753258" cy="2103120"/>
+          <p:cNvPr id="8" name="Text 5"/>
+          <p:cNvSpPr/>
+          <p:nvPr/>
+        </p:nvSpPr>
+        <p:spPr>
+          <a:xfrm>
+            <a:off x="960120" y="2926080"/>
+            <a:ext cx="4572000" cy="1005840"/>
           </a:xfrm>
           <a:prstGeom prst="rect">
             <a:avLst/>
@@ -2626,7 +2542,7 @@
                 <a:ea typeface="Calibri" pitchFamily="34" charset="-122"/>
                 <a:cs typeface="Calibri" pitchFamily="34" charset="-120"/>
               </a:rPr>
-              <a:t>Abandoned — assumptions about threading and API extensibility didn't fit this use case.</a:t>
+              <a:t>Simulates the remote receiver over RS-232, exercising both systems end-to-end without needing full deployment hardware.</a:t>
             </a:r>
             <a:endParaRPr lang="en-US" sz="1250" dirty="0"/>
           </a:p>
@@ -2634,60 +2550,257 @@
       </p:sp>
       <p:sp>
         <p:nvSpPr>
-          <p:cNvPr id="8" name="Shape 6"/>
-          <p:cNvSpPr/>
-          <p:nvPr/>
-        </p:nvSpPr>
-        <p:spPr>
-          <a:xfrm>
-            <a:off x="4069994" y="3749040"/>
-            <a:ext cx="292608" cy="0"/>
-          </a:xfrm>
-          <a:prstGeom prst="line">
-            <a:avLst/>
-          </a:prstGeom>
-          <a:noFill/>
-          <a:ln w="19050">
-            <a:solidFill>
-              <a:srgbClr val="6B6570"/>
-            </a:solidFill>
-            <a:prstDash val="solid"/>
-            <a:tailEnd type="triangle"/>
-          </a:ln>
-        </p:spPr>
-      </p:sp>
-      <p:sp>
-        <p:nvSpPr>
-          <p:cNvPr id="9" name="Shape 7"/>
-          <p:cNvSpPr/>
-          <p:nvPr/>
-        </p:nvSpPr>
-        <p:spPr>
-          <a:xfrm>
-            <a:off x="4399178" y="1828800"/>
-            <a:ext cx="3393338" cy="3931920"/>
+          <p:cNvPr id="9" name="Shape 6"/>
+          <p:cNvSpPr/>
+          <p:nvPr/>
+        </p:nvSpPr>
+        <p:spPr>
+          <a:xfrm>
+            <a:off x="960120" y="4078224"/>
+            <a:ext cx="109728" cy="109728"/>
+          </a:xfrm>
+          <a:prstGeom prst="ellipse">
+            <a:avLst/>
+          </a:prstGeom>
+          <a:solidFill>
+            <a:srgbClr val="0FA3A3"/>
+          </a:solidFill>
+          <a:ln/>
+        </p:spPr>
+      </p:sp>
+      <p:sp>
+        <p:nvSpPr>
+          <p:cNvPr id="10" name="Text 7"/>
+          <p:cNvSpPr/>
+          <p:nvPr/>
+        </p:nvSpPr>
+        <p:spPr>
+          <a:xfrm>
+            <a:off x="1188720" y="3931920"/>
+            <a:ext cx="4389120" cy="365760"/>
+          </a:xfrm>
+          <a:prstGeom prst="rect">
+            <a:avLst/>
+          </a:prstGeom>
+          <a:noFill/>
+          <a:ln/>
+        </p:spPr>
+        <p:txBody>
+          <a:bodyPr wrap="square" lIns="0" tIns="0" rIns="0" bIns="0" rtlCol="0" anchor="ctr"/>
+          <a:lstStyle/>
+          <a:p>
+            <a:pPr indent="0" marL="0">
+              <a:buNone/>
+            </a:pPr>
+            <a:r>
+              <a:rPr lang="en-US" sz="1250" dirty="0">
+                <a:solidFill>
+                  <a:srgbClr val="2B2730"/>
+                </a:solidFill>
+                <a:latin typeface="Calibri" pitchFamily="34" charset="0"/>
+                <a:ea typeface="Calibri" pitchFamily="34" charset="-122"/>
+                <a:cs typeface="Calibri" pitchFamily="34" charset="-120"/>
+              </a:rPr>
+              <a:t>Test 1 — Power configuration (Rohde &amp; Schwarz NRQ6)</a:t>
+            </a:r>
+            <a:endParaRPr lang="en-US" sz="1250" dirty="0"/>
+          </a:p>
+        </p:txBody>
+      </p:sp>
+      <p:sp>
+        <p:nvSpPr>
+          <p:cNvPr id="11" name="Shape 8"/>
+          <p:cNvSpPr/>
+          <p:nvPr/>
+        </p:nvSpPr>
+        <p:spPr>
+          <a:xfrm>
+            <a:off x="960120" y="4581144"/>
+            <a:ext cx="109728" cy="109728"/>
+          </a:xfrm>
+          <a:prstGeom prst="ellipse">
+            <a:avLst/>
+          </a:prstGeom>
+          <a:solidFill>
+            <a:srgbClr val="0FA3A3"/>
+          </a:solidFill>
+          <a:ln/>
+        </p:spPr>
+      </p:sp>
+      <p:sp>
+        <p:nvSpPr>
+          <p:cNvPr id="12" name="Text 9"/>
+          <p:cNvSpPr/>
+          <p:nvPr/>
+        </p:nvSpPr>
+        <p:spPr>
+          <a:xfrm>
+            <a:off x="1188720" y="4434840"/>
+            <a:ext cx="4389120" cy="365760"/>
+          </a:xfrm>
+          <a:prstGeom prst="rect">
+            <a:avLst/>
+          </a:prstGeom>
+          <a:noFill/>
+          <a:ln/>
+        </p:spPr>
+        <p:txBody>
+          <a:bodyPr wrap="square" lIns="0" tIns="0" rIns="0" bIns="0" rtlCol="0" anchor="ctr"/>
+          <a:lstStyle/>
+          <a:p>
+            <a:pPr indent="0" marL="0">
+              <a:buNone/>
+            </a:pPr>
+            <a:r>
+              <a:rPr lang="en-US" sz="1250" dirty="0">
+                <a:solidFill>
+                  <a:srgbClr val="2B2730"/>
+                </a:solidFill>
+                <a:latin typeface="Calibri" pitchFamily="34" charset="0"/>
+                <a:ea typeface="Calibri" pitchFamily="34" charset="-122"/>
+                <a:cs typeface="Calibri" pitchFamily="34" charset="-120"/>
+              </a:rPr>
+              <a:t>Test 2 — Frequency configuration (frequency counter)</a:t>
+            </a:r>
+            <a:endParaRPr lang="en-US" sz="1250" dirty="0"/>
+          </a:p>
+        </p:txBody>
+      </p:sp>
+      <p:sp>
+        <p:nvSpPr>
+          <p:cNvPr id="13" name="Shape 10"/>
+          <p:cNvSpPr/>
+          <p:nvPr/>
+        </p:nvSpPr>
+        <p:spPr>
+          <a:xfrm>
+            <a:off x="960120" y="5084064"/>
+            <a:ext cx="109728" cy="109728"/>
+          </a:xfrm>
+          <a:prstGeom prst="ellipse">
+            <a:avLst/>
+          </a:prstGeom>
+          <a:solidFill>
+            <a:srgbClr val="0FA3A3"/>
+          </a:solidFill>
+          <a:ln/>
+        </p:spPr>
+      </p:sp>
+      <p:sp>
+        <p:nvSpPr>
+          <p:cNvPr id="14" name="Text 11"/>
+          <p:cNvSpPr/>
+          <p:nvPr/>
+        </p:nvSpPr>
+        <p:spPr>
+          <a:xfrm>
+            <a:off x="1188720" y="4937760"/>
+            <a:ext cx="4389120" cy="365760"/>
+          </a:xfrm>
+          <a:prstGeom prst="rect">
+            <a:avLst/>
+          </a:prstGeom>
+          <a:noFill/>
+          <a:ln/>
+        </p:spPr>
+        <p:txBody>
+          <a:bodyPr wrap="square" lIns="0" tIns="0" rIns="0" bIns="0" rtlCol="0" anchor="ctr"/>
+          <a:lstStyle/>
+          <a:p>
+            <a:pPr indent="0" marL="0">
+              <a:buNone/>
+            </a:pPr>
+            <a:r>
+              <a:rPr lang="en-US" sz="1250" dirty="0">
+                <a:solidFill>
+                  <a:srgbClr val="2B2730"/>
+                </a:solidFill>
+                <a:latin typeface="Calibri" pitchFamily="34" charset="0"/>
+                <a:ea typeface="Calibri" pitchFamily="34" charset="-122"/>
+                <a:cs typeface="Calibri" pitchFamily="34" charset="-120"/>
+              </a:rPr>
+              <a:t>Test 3 — Signal recording (Ettus USRP X310)</a:t>
+            </a:r>
+            <a:endParaRPr lang="en-US" sz="1250" dirty="0"/>
+          </a:p>
+        </p:txBody>
+      </p:sp>
+      <p:sp>
+        <p:nvSpPr>
+          <p:cNvPr id="15" name="Shape 12"/>
+          <p:cNvSpPr/>
+          <p:nvPr/>
+        </p:nvSpPr>
+        <p:spPr>
+          <a:xfrm>
+            <a:off x="6035040" y="1828800"/>
+            <a:ext cx="5486400" cy="3931920"/>
           </a:xfrm>
           <a:prstGeom prst="roundRect">
             <a:avLst>
-              <a:gd name="adj" fmla="val 2156"/>
+              <a:gd name="adj" fmla="val 1860"/>
             </a:avLst>
           </a:prstGeom>
           <a:solidFill>
-            <a:srgbClr val="F6EEF0"/>
+            <a:srgbClr val="5C0E2E"/>
           </a:solidFill>
           <a:ln/>
         </p:spPr>
       </p:sp>
       <p:sp>
         <p:nvSpPr>
-          <p:cNvPr id="10" name="Text 8"/>
-          <p:cNvSpPr/>
-          <p:nvPr/>
-        </p:nvSpPr>
-        <p:spPr>
-          <a:xfrm>
-            <a:off x="4719218" y="2057400"/>
-            <a:ext cx="2753258" cy="548640"/>
+          <p:cNvPr id="16" name="Shape 13"/>
+          <p:cNvSpPr/>
+          <p:nvPr/>
+        </p:nvSpPr>
+        <p:spPr>
+          <a:xfrm>
+            <a:off x="6355080" y="2103120"/>
+            <a:ext cx="685800" cy="685800"/>
+          </a:xfrm>
+          <a:prstGeom prst="ellipse">
+            <a:avLst/>
+          </a:prstGeom>
+          <a:solidFill>
+            <a:srgbClr val="FFFFFF"/>
+          </a:solidFill>
+          <a:ln/>
+        </p:spPr>
+      </p:sp>
+      <p:pic>
+        <p:nvPicPr>
+          <p:cNvPr id="17" name="Image 1" descr="preencoded.png">    </p:cNvPr>
+          <p:cNvPicPr>
+            <a:picLocks noChangeAspect="1"/>
+          </p:cNvPicPr>
+          <p:nvPr/>
+        </p:nvPicPr>
+        <p:blipFill>
+          <a:blip r:embed="rId2"/>
+          <a:stretch>
+            <a:fillRect/>
+          </a:stretch>
+        </p:blipFill>
+        <p:spPr>
+          <a:xfrm>
+            <a:off x="6509385" y="2257425"/>
+            <a:ext cx="377190" cy="377190"/>
+          </a:xfrm>
+          <a:prstGeom prst="rect">
+            <a:avLst/>
+          </a:prstGeom>
+        </p:spPr>
+      </p:pic>
+      <p:sp>
+        <p:nvSpPr>
+          <p:cNvPr id="18" name="Text 14"/>
+          <p:cNvSpPr/>
+          <p:nvPr/>
+        </p:nvSpPr>
+        <p:spPr>
+          <a:xfrm>
+            <a:off x="7178040" y="2194560"/>
+            <a:ext cx="4206240" cy="457200"/>
           </a:xfrm>
           <a:prstGeom prst="rect">
             <a:avLst/>
@@ -2703,54 +2816,15 @@
               <a:buNone/>
             </a:pPr>
             <a:r>
-              <a:rPr lang="en-US" sz="2600" b="1" dirty="0">
-                <a:solidFill>
-                  <a:srgbClr val="5C0E2E"/>
+              <a:rPr lang="en-US" sz="1600" b="1" dirty="0">
+                <a:solidFill>
+                  <a:srgbClr val="FFFFFF"/>
                 </a:solidFill>
                 <a:latin typeface="Cambria" pitchFamily="34" charset="0"/>
                 <a:ea typeface="Cambria" pitchFamily="34" charset="-122"/>
                 <a:cs typeface="Cambria" pitchFamily="34" charset="-120"/>
               </a:rPr>
-              <a:t>v2</a:t>
-            </a:r>
-            <a:endParaRPr lang="en-US" sz="2600" dirty="0"/>
-          </a:p>
-        </p:txBody>
-      </p:sp>
-      <p:sp>
-        <p:nvSpPr>
-          <p:cNvPr id="11" name="Text 9"/>
-          <p:cNvSpPr/>
-          <p:nvPr/>
-        </p:nvSpPr>
-        <p:spPr>
-          <a:xfrm>
-            <a:off x="4719218" y="2697480"/>
-            <a:ext cx="2753258" cy="731520"/>
-          </a:xfrm>
-          <a:prstGeom prst="rect">
-            <a:avLst/>
-          </a:prstGeom>
-          <a:noFill/>
-          <a:ln/>
-        </p:spPr>
-        <p:txBody>
-          <a:bodyPr wrap="square" lIns="0" tIns="0" rIns="0" bIns="0" rtlCol="0" anchor="ctr"/>
-          <a:lstStyle/>
-          <a:p>
-            <a:pPr indent="0" marL="0">
-              <a:buNone/>
-            </a:pPr>
-            <a:r>
-              <a:rPr lang="en-US" sz="1600" b="1" dirty="0">
-                <a:solidFill>
-                  <a:srgbClr val="2B2730"/>
-                </a:solidFill>
-                <a:latin typeface="Cambria" pitchFamily="34" charset="0"/>
-                <a:ea typeface="Cambria" pitchFamily="34" charset="-122"/>
-                <a:cs typeface="Cambria" pitchFamily="34" charset="-120"/>
-              </a:rPr>
-              <a:t>Fully general rewrite</a:t>
+              <a:t>A finding worth noting</a:t>
             </a:r>
             <a:endParaRPr lang="en-US" sz="1600" dirty="0"/>
           </a:p>
@@ -2758,14 +2832,14 @@
       </p:sp>
       <p:sp>
         <p:nvSpPr>
-          <p:cNvPr id="12" name="Text 10"/>
-          <p:cNvSpPr/>
-          <p:nvPr/>
-        </p:nvSpPr>
-        <p:spPr>
-          <a:xfrm>
-            <a:off x="4719218" y="3429000"/>
-            <a:ext cx="2753258" cy="2103120"/>
+          <p:cNvPr id="19" name="Text 15"/>
+          <p:cNvSpPr/>
+          <p:nvPr/>
+        </p:nvSpPr>
+        <p:spPr>
+          <a:xfrm>
+            <a:off x="6355080" y="2926080"/>
+            <a:ext cx="4937760" cy="1280160"/>
           </a:xfrm>
           <a:prstGeom prst="rect">
             <a:avLst/>
@@ -2779,159 +2853,35 @@
           <a:p>
             <a:pPr indent="0" marL="0">
               <a:lnSpc>
-                <a:spcPct val="125000"/>
+                <a:spcPct val="130000"/>
               </a:lnSpc>
               <a:buNone/>
             </a:pPr>
             <a:r>
-              <a:rPr lang="en-US" sz="1250" dirty="0">
-                <a:solidFill>
-                  <a:srgbClr val="6B6570"/>
+              <a:rPr lang="en-US" sz="1300" dirty="0">
+                <a:solidFill>
+                  <a:srgbClr val="EBD9DF"/>
                 </a:solidFill>
                 <a:latin typeface="Calibri" pitchFamily="34" charset="0"/>
                 <a:ea typeface="Calibri" pitchFamily="34" charset="-122"/>
                 <a:cs typeface="Calibri" pitchFamily="34" charset="-120"/>
               </a:rPr>
-              <a:t>Abandoned — supported modulation types were never required; generality cost more than it gave.</a:t>
-            </a:r>
-            <a:endParaRPr lang="en-US" sz="1250" dirty="0"/>
-          </a:p>
-        </p:txBody>
-      </p:sp>
-      <p:sp>
-        <p:nvSpPr>
-          <p:cNvPr id="13" name="Shape 11"/>
-          <p:cNvSpPr/>
-          <p:nvPr/>
-        </p:nvSpPr>
-        <p:spPr>
-          <a:xfrm>
-            <a:off x="7829093" y="3749040"/>
-            <a:ext cx="292608" cy="0"/>
-          </a:xfrm>
-          <a:prstGeom prst="line">
-            <a:avLst/>
-          </a:prstGeom>
-          <a:noFill/>
-          <a:ln w="19050">
-            <a:solidFill>
-              <a:srgbClr val="6B6570"/>
-            </a:solidFill>
-            <a:prstDash val="solid"/>
-            <a:tailEnd type="triangle"/>
-          </a:ln>
-        </p:spPr>
-      </p:sp>
-      <p:sp>
-        <p:nvSpPr>
-          <p:cNvPr id="14" name="Shape 12"/>
-          <p:cNvSpPr/>
-          <p:nvPr/>
-        </p:nvSpPr>
-        <p:spPr>
-          <a:xfrm>
-            <a:off x="8158277" y="1828800"/>
-            <a:ext cx="3393338" cy="3931920"/>
-          </a:xfrm>
-          <a:prstGeom prst="roundRect">
-            <a:avLst>
-              <a:gd name="adj" fmla="val 2156"/>
-            </a:avLst>
-          </a:prstGeom>
-          <a:solidFill>
-            <a:srgbClr val="5C0E2E"/>
-          </a:solidFill>
-          <a:ln/>
-        </p:spPr>
-      </p:sp>
-      <p:sp>
-        <p:nvSpPr>
-          <p:cNvPr id="15" name="Text 13"/>
-          <p:cNvSpPr/>
-          <p:nvPr/>
-        </p:nvSpPr>
-        <p:spPr>
-          <a:xfrm>
-            <a:off x="8478317" y="2057400"/>
-            <a:ext cx="2753258" cy="548640"/>
-          </a:xfrm>
-          <a:prstGeom prst="rect">
-            <a:avLst/>
-          </a:prstGeom>
-          <a:noFill/>
-          <a:ln/>
-        </p:spPr>
-        <p:txBody>
-          <a:bodyPr wrap="square" lIns="0" tIns="0" rIns="0" bIns="0" rtlCol="0" anchor="ctr"/>
-          <a:lstStyle/>
-          <a:p>
-            <a:pPr indent="0" marL="0">
-              <a:buNone/>
-            </a:pPr>
-            <a:r>
-              <a:rPr lang="en-US" sz="2600" b="1" dirty="0">
-                <a:solidFill>
-                  <a:srgbClr val="0FA3A3"/>
-                </a:solidFill>
-                <a:latin typeface="Cambria" pitchFamily="34" charset="0"/>
-                <a:ea typeface="Cambria" pitchFamily="34" charset="-122"/>
-                <a:cs typeface="Cambria" pitchFamily="34" charset="-120"/>
-              </a:rPr>
-              <a:t>v3</a:t>
-            </a:r>
-            <a:endParaRPr lang="en-US" sz="2600" dirty="0"/>
-          </a:p>
-        </p:txBody>
-      </p:sp>
-      <p:sp>
-        <p:nvSpPr>
-          <p:cNvPr id="16" name="Text 14"/>
-          <p:cNvSpPr/>
-          <p:nvPr/>
-        </p:nvSpPr>
-        <p:spPr>
-          <a:xfrm>
-            <a:off x="8478317" y="2697480"/>
-            <a:ext cx="2753258" cy="731520"/>
-          </a:xfrm>
-          <a:prstGeom prst="rect">
-            <a:avLst/>
-          </a:prstGeom>
-          <a:noFill/>
-          <a:ln/>
-        </p:spPr>
-        <p:txBody>
-          <a:bodyPr wrap="square" lIns="0" tIns="0" rIns="0" bIns="0" rtlCol="0" anchor="ctr"/>
-          <a:lstStyle/>
-          <a:p>
-            <a:pPr indent="0" marL="0">
-              <a:buNone/>
-            </a:pPr>
-            <a:r>
-              <a:rPr lang="en-US" sz="1600" b="1" dirty="0">
-                <a:solidFill>
-                  <a:srgbClr val="FFFFFF"/>
-                </a:solidFill>
-                <a:latin typeface="Cambria" pitchFamily="34" charset="0"/>
-                <a:ea typeface="Cambria" pitchFamily="34" charset="-122"/>
-                <a:cs typeface="Cambria" pitchFamily="34" charset="-120"/>
-              </a:rPr>
-              <a:t>Scoped to DTA-2115B/2116</a:t>
-            </a:r>
-            <a:endParaRPr lang="en-US" sz="1600" dirty="0"/>
-          </a:p>
-        </p:txBody>
-      </p:sp>
-      <p:sp>
-        <p:nvSpPr>
-          <p:cNvPr id="17" name="Text 15"/>
-          <p:cNvSpPr/>
-          <p:nvPr/>
-        </p:nvSpPr>
-        <p:spPr>
-          <a:xfrm>
-            <a:off x="8478317" y="3429000"/>
-            <a:ext cx="2753258" cy="2103120"/>
+              <a:t>During integration with GMV's proprietary systems, the gRPC client-server boundary was not exercised — the proprietary system links the app component directly, in-process.</a:t>
+            </a:r>
+            <a:endParaRPr lang="en-US" sz="1300" dirty="0"/>
+          </a:p>
+        </p:txBody>
+      </p:sp>
+      <p:sp>
+        <p:nvSpPr>
+          <p:cNvPr id="20" name="Text 16"/>
+          <p:cNvSpPr/>
+          <p:nvPr/>
+        </p:nvSpPr>
+        <p:spPr>
+          <a:xfrm>
+            <a:off x="6355080" y="4389120"/>
+            <a:ext cx="4937760" cy="1188720"/>
           </a:xfrm>
           <a:prstGeom prst="rect">
             <a:avLst/>
@@ -2945,28 +2895,52 @@
           <a:p>
             <a:pPr indent="0" marL="0">
               <a:lnSpc>
-                <a:spcPct val="125000"/>
+                <a:spcPct val="130000"/>
               </a:lnSpc>
               <a:buNone/>
             </a:pPr>
             <a:r>
-              <a:rPr lang="en-US" sz="1250" dirty="0">
-                <a:solidFill>
-                  <a:srgbClr val="EBD9DF"/>
+              <a:rPr lang="en-US" sz="1250" i="1" dirty="0">
+                <a:solidFill>
+                  <a:srgbClr val="D8C7CF"/>
                 </a:solidFill>
                 <a:latin typeface="Calibri" pitchFamily="34" charset="0"/>
                 <a:ea typeface="Calibri" pitchFamily="34" charset="-122"/>
                 <a:cs typeface="Calibri" pitchFamily="34" charset="-120"/>
               </a:rPr>
-              <a:t>Adopted — narrowing to actual requirements made the system simpler to implement, test and reason about.</a:t>
+              <a:t>The gRPC layer remains functional and independently testable through the CLI client — it just wasn't the path this particular integration needed.</a:t>
             </a:r>
             <a:endParaRPr lang="en-US" sz="1250" dirty="0"/>
           </a:p>
         </p:txBody>
       </p:sp>
-      <p:sp>
-        <p:nvSpPr>
-          <p:cNvPr id="18" name="Text 16"/>
+      <p:pic>
+        <p:nvPicPr>
+          <p:cNvPr id="21" name="Image 2" descr="preencoded.png">    </p:cNvPr>
+          <p:cNvPicPr>
+            <a:picLocks noChangeAspect="1"/>
+          </p:cNvPicPr>
+          <p:nvPr/>
+        </p:nvPicPr>
+        <p:blipFill>
+          <a:blip r:embed="rId3"/>
+          <a:stretch>
+            <a:fillRect/>
+          </a:stretch>
+        </p:blipFill>
+        <p:spPr>
+          <a:xfrm>
+            <a:off x="10728655" y="6336792"/>
+            <a:ext cx="731520" cy="320040"/>
+          </a:xfrm>
+          <a:prstGeom prst="rect">
+            <a:avLst/>
+          </a:prstGeom>
+        </p:spPr>
+      </p:pic>
+      <p:sp>
+        <p:nvSpPr>
+          <p:cNvPr id="22" name="Text 17"/>
           <p:cNvSpPr/>
           <p:nvPr/>
         </p:nvSpPr>
@@ -2997,7 +2971,7 @@
                 <a:ea typeface="Calibri" pitchFamily="34" charset="-122"/>
                 <a:cs typeface="Calibri" pitchFamily="34" charset="-120"/>
               </a:rPr>
-              <a:t>1</a:t>
+              <a:t>9</a:t>
             </a:r>
             <a:endParaRPr lang="en-US" sz="1000" dirty="0"/>
           </a:p>
@@ -3005,7 +2979,7 @@
       </p:sp>
       <p:sp>
         <p:nvSpPr>
-          <p:cNvPr id="19" name="Text 17"/>
+          <p:cNvPr id="23" name="Text 18"/>
           <p:cNvSpPr/>
           <p:nvPr/>
         </p:nvSpPr>
@@ -3107,7 +3081,7 @@
                 <a:ea typeface="Calibri" pitchFamily="34" charset="-122"/>
                 <a:cs typeface="Calibri" pitchFamily="34" charset="-120"/>
               </a:rPr>
-              <a:t>INTEGRATION &amp; TESTING</a:t>
+              <a:t>CHALLENGES FACED</a:t>
             </a:r>
             <a:endParaRPr lang="en-US" sz="1300" dirty="0"/>
           </a:p>
@@ -3146,7 +3120,7 @@
                 <a:ea typeface="Cambria" pitchFamily="34" charset="-122"/>
                 <a:cs typeface="Cambria" pitchFamily="34" charset="-120"/>
               </a:rPr>
-              <a:t>Validated against real hardware</a:t>
+              <a:t>Where the hard problems actually were</a:t>
             </a:r>
             <a:endParaRPr lang="en-US" sz="3200" dirty="0"/>
           </a:p>
@@ -3160,12 +3134,12 @@
         </p:nvSpPr>
         <p:spPr>
           <a:xfrm>
-            <a:off x="640080" y="1828800"/>
-            <a:ext cx="5120640" cy="3931920"/>
+            <a:off x="640080" y="1920240"/>
+            <a:ext cx="5227168" cy="3657600"/>
           </a:xfrm>
           <a:prstGeom prst="roundRect">
             <a:avLst>
-              <a:gd name="adj" fmla="val 1860"/>
+              <a:gd name="adj" fmla="val 2000"/>
             </a:avLst>
           </a:prstGeom>
           <a:solidFill>
@@ -3182,8 +3156,8 @@
         </p:nvSpPr>
         <p:spPr>
           <a:xfrm>
-            <a:off x="960120" y="2103120"/>
-            <a:ext cx="685800" cy="685800"/>
+            <a:off x="1005840" y="2286000"/>
+            <a:ext cx="777240" cy="777240"/>
           </a:xfrm>
           <a:prstGeom prst="ellipse">
             <a:avLst/>
@@ -3210,8 +3184,8 @@
         </p:blipFill>
         <p:spPr>
           <a:xfrm>
-            <a:off x="1114425" y="2257425"/>
-            <a:ext cx="377190" cy="377190"/>
+            <a:off x="1180719" y="2460879"/>
+            <a:ext cx="427482" cy="427482"/>
           </a:xfrm>
           <a:prstGeom prst="rect">
             <a:avLst/>
@@ -3226,8 +3200,8 @@
         </p:nvSpPr>
         <p:spPr>
           <a:xfrm>
-            <a:off x="1783080" y="2194560"/>
-            <a:ext cx="3840480" cy="457200"/>
+            <a:off x="960120" y="3246120"/>
+            <a:ext cx="4587088" cy="548640"/>
           </a:xfrm>
           <a:prstGeom prst="rect">
             <a:avLst/>
@@ -3243,7 +3217,7 @@
               <a:buNone/>
             </a:pPr>
             <a:r>
-              <a:rPr lang="en-US" sz="1600" b="1" dirty="0">
+              <a:rPr lang="en-US" sz="1800" b="1" dirty="0">
                 <a:solidFill>
                   <a:srgbClr val="2B2730"/>
                 </a:solidFill>
@@ -3251,9 +3225,9 @@
                 <a:ea typeface="Cambria" pitchFamily="34" charset="-122"/>
                 <a:cs typeface="Cambria" pitchFamily="34" charset="-120"/>
               </a:rPr>
-              <a:t>External tester</a:t>
-            </a:r>
-            <a:endParaRPr lang="en-US" sz="1600" dirty="0"/>
+              <a:t>DTAPI quirks</a:t>
+            </a:r>
+            <a:endParaRPr lang="en-US" sz="1800" dirty="0"/>
           </a:p>
         </p:txBody>
       </p:sp>
@@ -3265,8 +3239,8 @@
         </p:nvSpPr>
         <p:spPr>
           <a:xfrm>
-            <a:off x="960120" y="2926080"/>
-            <a:ext cx="4572000" cy="1005840"/>
+            <a:off x="960120" y="3840480"/>
+            <a:ext cx="4587088" cy="1554480"/>
           </a:xfrm>
           <a:prstGeom prst="rect">
             <a:avLst/>
@@ -3280,12 +3254,12 @@
           <a:p>
             <a:pPr indent="0" marL="0">
               <a:lnSpc>
-                <a:spcPct val="125000"/>
+                <a:spcPct val="130000"/>
               </a:lnSpc>
               <a:buNone/>
             </a:pPr>
             <a:r>
-              <a:rPr lang="en-US" sz="1250" dirty="0">
+              <a:rPr lang="en-US" sz="1300" dirty="0">
                 <a:solidFill>
                   <a:srgbClr val="6B6570"/>
                 </a:solidFill>
@@ -3293,9 +3267,9 @@
                 <a:ea typeface="Calibri" pitchFamily="34" charset="-122"/>
                 <a:cs typeface="Calibri" pitchFamily="34" charset="-120"/>
               </a:rPr>
-              <a:t>Simulates the remote receiver over RS-232, exercising both systems end-to-end without needing full deployment hardware.</a:t>
-            </a:r>
-            <a:endParaRPr lang="en-US" sz="1250" dirty="0"/>
+              <a:t>DTAPI documentation isn't always accurate; some functions have unexpected side effects. Some don't show complete error information.</a:t>
+            </a:r>
+            <a:endParaRPr lang="en-US" sz="1300" dirty="0"/>
           </a:p>
         </p:txBody>
       </p:sp>
@@ -3307,207 +3281,30 @@
         </p:nvSpPr>
         <p:spPr>
           <a:xfrm>
-            <a:off x="960120" y="4078224"/>
-            <a:ext cx="109728" cy="109728"/>
-          </a:xfrm>
-          <a:prstGeom prst="ellipse">
-            <a:avLst/>
-          </a:prstGeom>
-          <a:solidFill>
-            <a:srgbClr val="0FA3A3"/>
-          </a:solidFill>
-          <a:ln/>
-        </p:spPr>
-      </p:sp>
-      <p:sp>
-        <p:nvSpPr>
-          <p:cNvPr id="10" name="Text 7"/>
-          <p:cNvSpPr/>
-          <p:nvPr/>
-        </p:nvSpPr>
-        <p:spPr>
-          <a:xfrm>
-            <a:off x="1188720" y="3931920"/>
-            <a:ext cx="4389120" cy="365760"/>
-          </a:xfrm>
-          <a:prstGeom prst="rect">
-            <a:avLst/>
-          </a:prstGeom>
-          <a:noFill/>
-          <a:ln/>
-        </p:spPr>
-        <p:txBody>
-          <a:bodyPr wrap="square" lIns="0" tIns="0" rIns="0" bIns="0" rtlCol="0" anchor="ctr"/>
-          <a:lstStyle/>
-          <a:p>
-            <a:pPr indent="0" marL="0">
-              <a:buNone/>
-            </a:pPr>
-            <a:r>
-              <a:rPr lang="en-US" sz="1250" dirty="0">
-                <a:solidFill>
-                  <a:srgbClr val="2B2730"/>
-                </a:solidFill>
-                <a:latin typeface="Calibri" pitchFamily="34" charset="0"/>
-                <a:ea typeface="Calibri" pitchFamily="34" charset="-122"/>
-                <a:cs typeface="Calibri" pitchFamily="34" charset="-120"/>
-              </a:rPr>
-              <a:t>Test 1 — Power configuration (Rohde &amp; Schwarz NRQ6)</a:t>
-            </a:r>
-            <a:endParaRPr lang="en-US" sz="1250" dirty="0"/>
-          </a:p>
-        </p:txBody>
-      </p:sp>
-      <p:sp>
-        <p:nvSpPr>
-          <p:cNvPr id="11" name="Shape 8"/>
-          <p:cNvSpPr/>
-          <p:nvPr/>
-        </p:nvSpPr>
-        <p:spPr>
-          <a:xfrm>
-            <a:off x="960120" y="4581144"/>
-            <a:ext cx="109728" cy="109728"/>
-          </a:xfrm>
-          <a:prstGeom prst="ellipse">
-            <a:avLst/>
-          </a:prstGeom>
-          <a:solidFill>
-            <a:srgbClr val="0FA3A3"/>
-          </a:solidFill>
-          <a:ln/>
-        </p:spPr>
-      </p:sp>
-      <p:sp>
-        <p:nvSpPr>
-          <p:cNvPr id="12" name="Text 9"/>
-          <p:cNvSpPr/>
-          <p:nvPr/>
-        </p:nvSpPr>
-        <p:spPr>
-          <a:xfrm>
-            <a:off x="1188720" y="4434840"/>
-            <a:ext cx="4389120" cy="365760"/>
-          </a:xfrm>
-          <a:prstGeom prst="rect">
-            <a:avLst/>
-          </a:prstGeom>
-          <a:noFill/>
-          <a:ln/>
-        </p:spPr>
-        <p:txBody>
-          <a:bodyPr wrap="square" lIns="0" tIns="0" rIns="0" bIns="0" rtlCol="0" anchor="ctr"/>
-          <a:lstStyle/>
-          <a:p>
-            <a:pPr indent="0" marL="0">
-              <a:buNone/>
-            </a:pPr>
-            <a:r>
-              <a:rPr lang="en-US" sz="1250" dirty="0">
-                <a:solidFill>
-                  <a:srgbClr val="2B2730"/>
-                </a:solidFill>
-                <a:latin typeface="Calibri" pitchFamily="34" charset="0"/>
-                <a:ea typeface="Calibri" pitchFamily="34" charset="-122"/>
-                <a:cs typeface="Calibri" pitchFamily="34" charset="-120"/>
-              </a:rPr>
-              <a:t>Test 2 — Frequency configuration (frequency counter)</a:t>
-            </a:r>
-            <a:endParaRPr lang="en-US" sz="1250" dirty="0"/>
-          </a:p>
-        </p:txBody>
-      </p:sp>
-      <p:sp>
-        <p:nvSpPr>
-          <p:cNvPr id="13" name="Shape 10"/>
-          <p:cNvSpPr/>
-          <p:nvPr/>
-        </p:nvSpPr>
-        <p:spPr>
-          <a:xfrm>
-            <a:off x="960120" y="5084064"/>
-            <a:ext cx="109728" cy="109728"/>
-          </a:xfrm>
-          <a:prstGeom prst="ellipse">
-            <a:avLst/>
-          </a:prstGeom>
-          <a:solidFill>
-            <a:srgbClr val="0FA3A3"/>
-          </a:solidFill>
-          <a:ln/>
-        </p:spPr>
-      </p:sp>
-      <p:sp>
-        <p:nvSpPr>
-          <p:cNvPr id="14" name="Text 11"/>
-          <p:cNvSpPr/>
-          <p:nvPr/>
-        </p:nvSpPr>
-        <p:spPr>
-          <a:xfrm>
-            <a:off x="1188720" y="4937760"/>
-            <a:ext cx="4389120" cy="365760"/>
-          </a:xfrm>
-          <a:prstGeom prst="rect">
-            <a:avLst/>
-          </a:prstGeom>
-          <a:noFill/>
-          <a:ln/>
-        </p:spPr>
-        <p:txBody>
-          <a:bodyPr wrap="square" lIns="0" tIns="0" rIns="0" bIns="0" rtlCol="0" anchor="ctr"/>
-          <a:lstStyle/>
-          <a:p>
-            <a:pPr indent="0" marL="0">
-              <a:buNone/>
-            </a:pPr>
-            <a:r>
-              <a:rPr lang="en-US" sz="1250" dirty="0">
-                <a:solidFill>
-                  <a:srgbClr val="2B2730"/>
-                </a:solidFill>
-                <a:latin typeface="Calibri" pitchFamily="34" charset="0"/>
-                <a:ea typeface="Calibri" pitchFamily="34" charset="-122"/>
-                <a:cs typeface="Calibri" pitchFamily="34" charset="-120"/>
-              </a:rPr>
-              <a:t>Test 3 — Signal recording (Ettus USRP X310)</a:t>
-            </a:r>
-            <a:endParaRPr lang="en-US" sz="1250" dirty="0"/>
-          </a:p>
-        </p:txBody>
-      </p:sp>
-      <p:sp>
-        <p:nvSpPr>
-          <p:cNvPr id="15" name="Shape 12"/>
-          <p:cNvSpPr/>
-          <p:nvPr/>
-        </p:nvSpPr>
-        <p:spPr>
-          <a:xfrm>
-            <a:off x="6035040" y="1828800"/>
-            <a:ext cx="5486400" cy="3931920"/>
+            <a:off x="6324448" y="1920240"/>
+            <a:ext cx="5227168" cy="3657600"/>
           </a:xfrm>
           <a:prstGeom prst="roundRect">
             <a:avLst>
-              <a:gd name="adj" fmla="val 1860"/>
+              <a:gd name="adj" fmla="val 2000"/>
             </a:avLst>
           </a:prstGeom>
           <a:solidFill>
-            <a:srgbClr val="5C0E2E"/>
+            <a:srgbClr val="F6EEF0"/>
           </a:solidFill>
           <a:ln/>
         </p:spPr>
       </p:sp>
       <p:sp>
         <p:nvSpPr>
-          <p:cNvPr id="16" name="Shape 13"/>
-          <p:cNvSpPr/>
-          <p:nvPr/>
-        </p:nvSpPr>
-        <p:spPr>
-          <a:xfrm>
-            <a:off x="6355080" y="2103120"/>
-            <a:ext cx="685800" cy="685800"/>
+          <p:cNvPr id="10" name="Shape 7"/>
+          <p:cNvSpPr/>
+          <p:nvPr/>
+        </p:nvSpPr>
+        <p:spPr>
+          <a:xfrm>
+            <a:off x="6690208" y="2286000"/>
+            <a:ext cx="777240" cy="777240"/>
           </a:xfrm>
           <a:prstGeom prst="ellipse">
             <a:avLst/>
@@ -3520,7 +3317,7 @@
       </p:sp>
       <p:pic>
         <p:nvPicPr>
-          <p:cNvPr id="17" name="Image 1" descr="preencoded.png">    </p:cNvPr>
+          <p:cNvPr id="11" name="Image 1" descr="preencoded.png">    </p:cNvPr>
           <p:cNvPicPr>
             <a:picLocks noChangeAspect="1"/>
           </p:cNvPicPr>
@@ -3534,8 +3331,8 @@
         </p:blipFill>
         <p:spPr>
           <a:xfrm>
-            <a:off x="6509385" y="2257425"/>
-            <a:ext cx="377190" cy="377190"/>
+            <a:off x="6865087" y="2460879"/>
+            <a:ext cx="427482" cy="427482"/>
           </a:xfrm>
           <a:prstGeom prst="rect">
             <a:avLst/>
@@ -3544,14 +3341,14 @@
       </p:pic>
       <p:sp>
         <p:nvSpPr>
-          <p:cNvPr id="18" name="Text 14"/>
-          <p:cNvSpPr/>
-          <p:nvPr/>
-        </p:nvSpPr>
-        <p:spPr>
-          <a:xfrm>
-            <a:off x="7178040" y="2194560"/>
-            <a:ext cx="4206240" cy="457200"/>
+          <p:cNvPr id="12" name="Text 8"/>
+          <p:cNvSpPr/>
+          <p:nvPr/>
+        </p:nvSpPr>
+        <p:spPr>
+          <a:xfrm>
+            <a:off x="6644488" y="3246120"/>
+            <a:ext cx="4587088" cy="548640"/>
           </a:xfrm>
           <a:prstGeom prst="rect">
             <a:avLst/>
@@ -3567,30 +3364,30 @@
               <a:buNone/>
             </a:pPr>
             <a:r>
-              <a:rPr lang="en-US" sz="1600" b="1" dirty="0">
-                <a:solidFill>
-                  <a:srgbClr val="FFFFFF"/>
+              <a:rPr lang="en-US" sz="1800" b="1" dirty="0">
+                <a:solidFill>
+                  <a:srgbClr val="2B2730"/>
                 </a:solidFill>
                 <a:latin typeface="Cambria" pitchFamily="34" charset="0"/>
                 <a:ea typeface="Cambria" pitchFamily="34" charset="-122"/>
                 <a:cs typeface="Cambria" pitchFamily="34" charset="-120"/>
               </a:rPr>
-              <a:t>A finding worth noting</a:t>
-            </a:r>
-            <a:endParaRPr lang="en-US" sz="1600" dirty="0"/>
-          </a:p>
-        </p:txBody>
-      </p:sp>
-      <p:sp>
-        <p:nvSpPr>
-          <p:cNvPr id="19" name="Text 15"/>
-          <p:cNvSpPr/>
-          <p:nvPr/>
-        </p:nvSpPr>
-        <p:spPr>
-          <a:xfrm>
-            <a:off x="6355080" y="2926080"/>
-            <a:ext cx="4937760" cy="1280160"/>
+              <a:t>Serial driver &amp; wiring</a:t>
+            </a:r>
+            <a:endParaRPr lang="en-US" sz="1800" dirty="0"/>
+          </a:p>
+        </p:txBody>
+      </p:sp>
+      <p:sp>
+        <p:nvSpPr>
+          <p:cNvPr id="13" name="Text 9"/>
+          <p:cNvSpPr/>
+          <p:nvPr/>
+        </p:nvSpPr>
+        <p:spPr>
+          <a:xfrm>
+            <a:off x="6644488" y="3840480"/>
+            <a:ext cx="4587088" cy="1554480"/>
           </a:xfrm>
           <a:prstGeom prst="rect">
             <a:avLst/>
@@ -3611,94 +3408,76 @@
             <a:r>
               <a:rPr lang="en-US" sz="1300" dirty="0">
                 <a:solidFill>
-                  <a:srgbClr val="EBD9DF"/>
+                  <a:srgbClr val="6B6570"/>
                 </a:solidFill>
                 <a:latin typeface="Calibri" pitchFamily="34" charset="0"/>
                 <a:ea typeface="Calibri" pitchFamily="34" charset="-122"/>
                 <a:cs typeface="Calibri" pitchFamily="34" charset="-120"/>
               </a:rPr>
-              <a:t>During integration with GMV's proprietary systems, the gRPC client-server boundary was not exercised — the proprietary system links the app component directly, in-process.</a:t>
+              <a:t>Generic 8250 driver was insufficient for the WCH CH382 card; replaced with the vendor driver. A missing null-modem adapter caused two DTE devices to transmit into each other's TX line.</a:t>
             </a:r>
             <a:endParaRPr lang="en-US" sz="1300" dirty="0"/>
           </a:p>
         </p:txBody>
       </p:sp>
-      <p:sp>
-        <p:nvSpPr>
-          <p:cNvPr id="20" name="Text 16"/>
-          <p:cNvSpPr/>
-          <p:nvPr/>
-        </p:nvSpPr>
-        <p:spPr>
-          <a:xfrm>
-            <a:off x="6355080" y="4389120"/>
-            <a:ext cx="4937760" cy="1188720"/>
-          </a:xfrm>
-          <a:prstGeom prst="rect">
-            <a:avLst/>
-          </a:prstGeom>
-          <a:noFill/>
-          <a:ln/>
-        </p:spPr>
-        <p:txBody>
-          <a:bodyPr wrap="square" lIns="0" tIns="0" rIns="0" bIns="0" rtlCol="0" anchor="ctr"/>
-          <a:lstStyle/>
-          <a:p>
-            <a:pPr indent="0" marL="0">
-              <a:lnSpc>
-                <a:spcPct val="130000"/>
-              </a:lnSpc>
-              <a:buNone/>
-            </a:pPr>
-            <a:r>
-              <a:rPr lang="en-US" sz="1250" i="1" dirty="0">
-                <a:solidFill>
-                  <a:srgbClr val="D8C7CF"/>
+      <p:pic>
+        <p:nvPicPr>
+          <p:cNvPr id="14" name="Image 2" descr="preencoded.png">    </p:cNvPr>
+          <p:cNvPicPr>
+            <a:picLocks noChangeAspect="1"/>
+          </p:cNvPicPr>
+          <p:nvPr/>
+        </p:nvPicPr>
+        <p:blipFill>
+          <a:blip r:embed="rId3"/>
+          <a:stretch>
+            <a:fillRect/>
+          </a:stretch>
+        </p:blipFill>
+        <p:spPr>
+          <a:xfrm>
+            <a:off x="10728655" y="6336792"/>
+            <a:ext cx="731520" cy="320040"/>
+          </a:xfrm>
+          <a:prstGeom prst="rect">
+            <a:avLst/>
+          </a:prstGeom>
+        </p:spPr>
+      </p:pic>
+      <p:sp>
+        <p:nvSpPr>
+          <p:cNvPr id="15" name="Text 10"/>
+          <p:cNvSpPr/>
+          <p:nvPr/>
+        </p:nvSpPr>
+        <p:spPr>
+          <a:xfrm>
+            <a:off x="11551615" y="6446520"/>
+            <a:ext cx="457200" cy="274320"/>
+          </a:xfrm>
+          <a:prstGeom prst="rect">
+            <a:avLst/>
+          </a:prstGeom>
+          <a:noFill/>
+          <a:ln/>
+        </p:spPr>
+        <p:txBody>
+          <a:bodyPr wrap="square" rtlCol="0" anchor="ctr"/>
+          <a:lstStyle/>
+          <a:p>
+            <a:pPr algn="r" indent="0" marL="0">
+              <a:buNone/>
+            </a:pPr>
+            <a:r>
+              <a:rPr lang="en-US" sz="1000" dirty="0">
+                <a:solidFill>
+                  <a:srgbClr val="6B6570"/>
                 </a:solidFill>
                 <a:latin typeface="Calibri" pitchFamily="34" charset="0"/>
                 <a:ea typeface="Calibri" pitchFamily="34" charset="-122"/>
                 <a:cs typeface="Calibri" pitchFamily="34" charset="-120"/>
               </a:rPr>
-              <a:t>The gRPC layer remains functional and independently testable through the CLI client — it just wasn't the path this particular integration needed.</a:t>
-            </a:r>
-            <a:endParaRPr lang="en-US" sz="1250" dirty="0"/>
-          </a:p>
-        </p:txBody>
-      </p:sp>
-      <p:sp>
-        <p:nvSpPr>
-          <p:cNvPr id="21" name="Text 17"/>
-          <p:cNvSpPr/>
-          <p:nvPr/>
-        </p:nvSpPr>
-        <p:spPr>
-          <a:xfrm>
-            <a:off x="11551615" y="6446520"/>
-            <a:ext cx="457200" cy="274320"/>
-          </a:xfrm>
-          <a:prstGeom prst="rect">
-            <a:avLst/>
-          </a:prstGeom>
-          <a:noFill/>
-          <a:ln/>
-        </p:spPr>
-        <p:txBody>
-          <a:bodyPr wrap="square" rtlCol="0" anchor="ctr"/>
-          <a:lstStyle/>
-          <a:p>
-            <a:pPr algn="r" indent="0" marL="0">
-              <a:buNone/>
-            </a:pPr>
-            <a:r>
-              <a:rPr lang="en-US" sz="1000" dirty="0">
-                <a:solidFill>
-                  <a:srgbClr val="6B6570"/>
-                </a:solidFill>
-                <a:latin typeface="Calibri" pitchFamily="34" charset="0"/>
-                <a:ea typeface="Calibri" pitchFamily="34" charset="-122"/>
-                <a:cs typeface="Calibri" pitchFamily="34" charset="-120"/>
-              </a:rPr>
-              <a:t>1</a:t>
+              <a:t>10</a:t>
             </a:r>
             <a:endParaRPr lang="en-US" sz="1000" dirty="0"/>
           </a:p>
@@ -3706,7 +3485,7 @@
       </p:sp>
       <p:sp>
         <p:nvSpPr>
-          <p:cNvPr id="22" name="Text 18"/>
+          <p:cNvPr id="16" name="Text 11"/>
           <p:cNvSpPr/>
           <p:nvPr/>
         </p:nvSpPr>
@@ -3757,7 +3536,7 @@
     <p:bg>
       <p:bgPr>
         <a:solidFill>
-          <a:srgbClr val="FFFFFF"/>
+          <a:srgbClr val="3D0920"/>
         </a:solidFill>
       </p:bgPr>
     </p:bg>
@@ -3802,13 +3581,13 @@
             <a:r>
               <a:rPr lang="en-US" sz="1300" b="1" spc="200" kern="0" dirty="0">
                 <a:solidFill>
-                  <a:srgbClr val="5C0E2E"/>
+                  <a:srgbClr val="0FA3A3"/>
                 </a:solidFill>
                 <a:latin typeface="Calibri" pitchFamily="34" charset="0"/>
                 <a:ea typeface="Calibri" pitchFamily="34" charset="-122"/>
                 <a:cs typeface="Calibri" pitchFamily="34" charset="-120"/>
               </a:rPr>
-              <a:t>CHALLENGES FACED</a:t>
+              <a:t>CONCLUSION</a:t>
             </a:r>
             <a:endParaRPr lang="en-US" sz="1300" dirty="0"/>
           </a:p>
@@ -3841,13 +3620,13 @@
             <a:r>
               <a:rPr lang="en-US" sz="3200" b="1" dirty="0">
                 <a:solidFill>
-                  <a:srgbClr val="2B2730"/>
+                  <a:srgbClr val="FFFFFF"/>
                 </a:solidFill>
                 <a:latin typeface="Cambria" pitchFamily="34" charset="0"/>
                 <a:ea typeface="Cambria" pitchFamily="34" charset="-122"/>
                 <a:cs typeface="Cambria" pitchFamily="34" charset="-120"/>
               </a:rPr>
-              <a:t>Where the hard problems actually were</a:t>
+              <a:t>Two systems, one consistent engineering approach</a:t>
             </a:r>
             <a:endParaRPr lang="en-US" sz="3200" dirty="0"/>
           </a:p>
@@ -3861,43 +3640,21 @@
         </p:nvSpPr>
         <p:spPr>
           <a:xfrm>
-            <a:off x="640080" y="1920240"/>
-            <a:ext cx="5227168" cy="3657600"/>
-          </a:xfrm>
-          <a:prstGeom prst="roundRect">
-            <a:avLst>
-              <a:gd name="adj" fmla="val 2000"/>
-            </a:avLst>
+            <a:off x="640080" y="2103120"/>
+            <a:ext cx="548640" cy="548640"/>
+          </a:xfrm>
+          <a:prstGeom prst="ellipse">
+            <a:avLst/>
           </a:prstGeom>
           <a:solidFill>
-            <a:srgbClr val="F6EEF0"/>
-          </a:solidFill>
-          <a:ln/>
-        </p:spPr>
-      </p:sp>
-      <p:sp>
-        <p:nvSpPr>
-          <p:cNvPr id="5" name="Shape 3"/>
-          <p:cNvSpPr/>
-          <p:nvPr/>
-        </p:nvSpPr>
-        <p:spPr>
-          <a:xfrm>
-            <a:off x="1005840" y="2286000"/>
-            <a:ext cx="777240" cy="777240"/>
-          </a:xfrm>
-          <a:prstGeom prst="ellipse">
-            <a:avLst/>
-          </a:prstGeom>
-          <a:solidFill>
-            <a:srgbClr val="FFFFFF"/>
+            <a:srgbClr val="5C0E2E"/>
           </a:solidFill>
           <a:ln/>
         </p:spPr>
       </p:sp>
       <p:pic>
         <p:nvPicPr>
-          <p:cNvPr id="6" name="Image 0" descr="preencoded.png">    </p:cNvPr>
+          <p:cNvPr id="5" name="Image 0" descr="preencoded.png">    </p:cNvPr>
           <p:cNvPicPr>
             <a:picLocks noChangeAspect="1"/>
           </p:cNvPicPr>
@@ -3911,8 +3668,8 @@
         </p:blipFill>
         <p:spPr>
           <a:xfrm>
-            <a:off x="1180719" y="2460879"/>
-            <a:ext cx="427482" cy="427482"/>
+            <a:off x="763524" y="2226564"/>
+            <a:ext cx="301752" cy="301752"/>
           </a:xfrm>
           <a:prstGeom prst="rect">
             <a:avLst/>
@@ -3921,53 +3678,14 @@
       </p:pic>
       <p:sp>
         <p:nvSpPr>
-          <p:cNvPr id="7" name="Text 4"/>
-          <p:cNvSpPr/>
-          <p:nvPr/>
-        </p:nvSpPr>
-        <p:spPr>
-          <a:xfrm>
-            <a:off x="960120" y="3246120"/>
-            <a:ext cx="4587088" cy="548640"/>
-          </a:xfrm>
-          <a:prstGeom prst="rect">
-            <a:avLst/>
-          </a:prstGeom>
-          <a:noFill/>
-          <a:ln/>
-        </p:spPr>
-        <p:txBody>
-          <a:bodyPr wrap="square" lIns="0" tIns="0" rIns="0" bIns="0" rtlCol="0" anchor="ctr"/>
-          <a:lstStyle/>
-          <a:p>
-            <a:pPr indent="0" marL="0">
-              <a:buNone/>
-            </a:pPr>
-            <a:r>
-              <a:rPr lang="en-US" sz="1800" b="1" dirty="0">
-                <a:solidFill>
-                  <a:srgbClr val="2B2730"/>
-                </a:solidFill>
-                <a:latin typeface="Cambria" pitchFamily="34" charset="0"/>
-                <a:ea typeface="Cambria" pitchFamily="34" charset="-122"/>
-                <a:cs typeface="Cambria" pitchFamily="34" charset="-120"/>
-              </a:rPr>
-              <a:t>DTAPI quirks</a:t>
-            </a:r>
-            <a:endParaRPr lang="en-US" sz="1800" dirty="0"/>
-          </a:p>
-        </p:txBody>
-      </p:sp>
-      <p:sp>
-        <p:nvSpPr>
-          <p:cNvPr id="8" name="Text 5"/>
-          <p:cNvSpPr/>
-          <p:nvPr/>
-        </p:nvSpPr>
-        <p:spPr>
-          <a:xfrm>
-            <a:off x="960120" y="3840480"/>
-            <a:ext cx="4587088" cy="1554480"/>
+          <p:cNvPr id="6" name="Text 3"/>
+          <p:cNvSpPr/>
+          <p:nvPr/>
+        </p:nvSpPr>
+        <p:spPr>
+          <a:xfrm>
+            <a:off x="1417320" y="2084832"/>
+            <a:ext cx="9875520" cy="822960"/>
           </a:xfrm>
           <a:prstGeom prst="rect">
             <a:avLst/>
@@ -3981,70 +3699,48 @@
           <a:p>
             <a:pPr indent="0" marL="0">
               <a:lnSpc>
-                <a:spcPct val="130000"/>
+                <a:spcPct val="125000"/>
               </a:lnSpc>
               <a:buNone/>
             </a:pPr>
             <a:r>
-              <a:rPr lang="en-US" sz="1300" dirty="0">
-                <a:solidFill>
-                  <a:srgbClr val="6B6570"/>
+              <a:rPr lang="en-US" sz="1500" dirty="0">
+                <a:solidFill>
+                  <a:srgbClr val="FFFFFF"/>
                 </a:solidFill>
                 <a:latin typeface="Calibri" pitchFamily="34" charset="0"/>
                 <a:ea typeface="Calibri" pitchFamily="34" charset="-122"/>
                 <a:cs typeface="Calibri" pitchFamily="34" charset="-120"/>
               </a:rPr>
-              <a:t>DTAPI documentation isn't always accurate; some functions have unexpected side effects. Some don't show complete error information.</a:t>
-            </a:r>
-            <a:endParaRPr lang="en-US" sz="1300" dirty="0"/>
-          </a:p>
-        </p:txBody>
-      </p:sp>
-      <p:sp>
-        <p:nvSpPr>
-          <p:cNvPr id="9" name="Shape 6"/>
-          <p:cNvSpPr/>
-          <p:nvPr/>
-        </p:nvSpPr>
-        <p:spPr>
-          <a:xfrm>
-            <a:off x="6324448" y="1920240"/>
-            <a:ext cx="5227168" cy="3657600"/>
-          </a:xfrm>
-          <a:prstGeom prst="roundRect">
-            <a:avLst>
-              <a:gd name="adj" fmla="val 2000"/>
-            </a:avLst>
+              <a:t>SDR Control System — a clean, remotely accessible, gRPC-based abstraction over the DTAPI.</a:t>
+            </a:r>
+            <a:endParaRPr lang="en-US" sz="1500" dirty="0"/>
+          </a:p>
+        </p:txBody>
+      </p:sp>
+      <p:sp>
+        <p:nvSpPr>
+          <p:cNvPr id="7" name="Shape 4"/>
+          <p:cNvSpPr/>
+          <p:nvPr/>
+        </p:nvSpPr>
+        <p:spPr>
+          <a:xfrm>
+            <a:off x="640080" y="3246120"/>
+            <a:ext cx="548640" cy="548640"/>
+          </a:xfrm>
+          <a:prstGeom prst="ellipse">
+            <a:avLst/>
           </a:prstGeom>
           <a:solidFill>
-            <a:srgbClr val="F6EEF0"/>
-          </a:solidFill>
-          <a:ln/>
-        </p:spPr>
-      </p:sp>
-      <p:sp>
-        <p:nvSpPr>
-          <p:cNvPr id="10" name="Shape 7"/>
-          <p:cNvSpPr/>
-          <p:nvPr/>
-        </p:nvSpPr>
-        <p:spPr>
-          <a:xfrm>
-            <a:off x="6690208" y="2286000"/>
-            <a:ext cx="777240" cy="777240"/>
-          </a:xfrm>
-          <a:prstGeom prst="ellipse">
-            <a:avLst/>
-          </a:prstGeom>
-          <a:solidFill>
-            <a:srgbClr val="FFFFFF"/>
+            <a:srgbClr val="5C0E2E"/>
           </a:solidFill>
           <a:ln/>
         </p:spPr>
       </p:sp>
       <p:pic>
         <p:nvPicPr>
-          <p:cNvPr id="11" name="Image 1" descr="preencoded.png">    </p:cNvPr>
+          <p:cNvPr id="8" name="Image 1" descr="preencoded.png">    </p:cNvPr>
           <p:cNvPicPr>
             <a:picLocks noChangeAspect="1"/>
           </p:cNvPicPr>
@@ -4058,8 +3754,8 @@
         </p:blipFill>
         <p:spPr>
           <a:xfrm>
-            <a:off x="6865087" y="2460879"/>
-            <a:ext cx="427482" cy="427482"/>
+            <a:off x="763524" y="3369564"/>
+            <a:ext cx="301752" cy="301752"/>
           </a:xfrm>
           <a:prstGeom prst="rect">
             <a:avLst/>
@@ -4068,53 +3764,14 @@
       </p:pic>
       <p:sp>
         <p:nvSpPr>
-          <p:cNvPr id="12" name="Text 8"/>
-          <p:cNvSpPr/>
-          <p:nvPr/>
-        </p:nvSpPr>
-        <p:spPr>
-          <a:xfrm>
-            <a:off x="6644488" y="3246120"/>
-            <a:ext cx="4587088" cy="548640"/>
-          </a:xfrm>
-          <a:prstGeom prst="rect">
-            <a:avLst/>
-          </a:prstGeom>
-          <a:noFill/>
-          <a:ln/>
-        </p:spPr>
-        <p:txBody>
-          <a:bodyPr wrap="square" lIns="0" tIns="0" rIns="0" bIns="0" rtlCol="0" anchor="ctr"/>
-          <a:lstStyle/>
-          <a:p>
-            <a:pPr indent="0" marL="0">
-              <a:buNone/>
-            </a:pPr>
-            <a:r>
-              <a:rPr lang="en-US" sz="1800" b="1" dirty="0">
-                <a:solidFill>
-                  <a:srgbClr val="2B2730"/>
-                </a:solidFill>
-                <a:latin typeface="Cambria" pitchFamily="34" charset="0"/>
-                <a:ea typeface="Cambria" pitchFamily="34" charset="-122"/>
-                <a:cs typeface="Cambria" pitchFamily="34" charset="-120"/>
-              </a:rPr>
-              <a:t>Serial driver &amp; wiring</a:t>
-            </a:r>
-            <a:endParaRPr lang="en-US" sz="1800" dirty="0"/>
-          </a:p>
-        </p:txBody>
-      </p:sp>
-      <p:sp>
-        <p:nvSpPr>
-          <p:cNvPr id="13" name="Text 9"/>
-          <p:cNvSpPr/>
-          <p:nvPr/>
-        </p:nvSpPr>
-        <p:spPr>
-          <a:xfrm>
-            <a:off x="6644488" y="3840480"/>
-            <a:ext cx="4587088" cy="1554480"/>
+          <p:cNvPr id="9" name="Text 5"/>
+          <p:cNvSpPr/>
+          <p:nvPr/>
+        </p:nvSpPr>
+        <p:spPr>
+          <a:xfrm>
+            <a:off x="1417320" y="3227832"/>
+            <a:ext cx="9875520" cy="822960"/>
           </a:xfrm>
           <a:prstGeom prst="rect">
             <a:avLst/>
@@ -4128,59 +3785,169 @@
           <a:p>
             <a:pPr indent="0" marL="0">
               <a:lnSpc>
-                <a:spcPct val="130000"/>
+                <a:spcPct val="125000"/>
               </a:lnSpc>
               <a:buNone/>
             </a:pPr>
             <a:r>
-              <a:rPr lang="en-US" sz="1300" dirty="0">
-                <a:solidFill>
-                  <a:srgbClr val="6B6570"/>
+              <a:rPr lang="en-US" sz="1500" dirty="0">
+                <a:solidFill>
+                  <a:srgbClr val="FFFFFF"/>
                 </a:solidFill>
                 <a:latin typeface="Calibri" pitchFamily="34" charset="0"/>
                 <a:ea typeface="Calibri" pitchFamily="34" charset="-122"/>
                 <a:cs typeface="Calibri" pitchFamily="34" charset="-120"/>
               </a:rPr>
-              <a:t>Generic 8250 driver was insufficient for the WCH CH382 card; replaced with the vendor driver. A missing null-modem adapter caused two DTE devices to transmit into each other's TX line.</a:t>
-            </a:r>
-            <a:endParaRPr lang="en-US" sz="1300" dirty="0"/>
-          </a:p>
-        </p:txBody>
-      </p:sp>
-      <p:sp>
-        <p:nvSpPr>
-          <p:cNvPr id="14" name="Text 10"/>
-          <p:cNvSpPr/>
-          <p:nvPr/>
-        </p:nvSpPr>
-        <p:spPr>
-          <a:xfrm>
-            <a:off x="11551615" y="6446520"/>
-            <a:ext cx="457200" cy="274320"/>
-          </a:xfrm>
-          <a:prstGeom prst="rect">
-            <a:avLst/>
-          </a:prstGeom>
-          <a:noFill/>
-          <a:ln/>
-        </p:spPr>
-        <p:txBody>
-          <a:bodyPr wrap="square" rtlCol="0" anchor="ctr"/>
-          <a:lstStyle/>
-          <a:p>
-            <a:pPr algn="r" indent="0" marL="0">
-              <a:buNone/>
-            </a:pPr>
-            <a:r>
-              <a:rPr lang="en-US" sz="1000" dirty="0">
-                <a:solidFill>
-                  <a:srgbClr val="6B6570"/>
+              <a:t>RS-232 Interface — a lightweight, extensible protocol layer using Boost.PFR and COBS.</a:t>
+            </a:r>
+            <a:endParaRPr lang="en-US" sz="1500" dirty="0"/>
+          </a:p>
+        </p:txBody>
+      </p:sp>
+      <p:sp>
+        <p:nvSpPr>
+          <p:cNvPr id="10" name="Shape 6"/>
+          <p:cNvSpPr/>
+          <p:nvPr/>
+        </p:nvSpPr>
+        <p:spPr>
+          <a:xfrm>
+            <a:off x="640080" y="4389120"/>
+            <a:ext cx="548640" cy="548640"/>
+          </a:xfrm>
+          <a:prstGeom prst="ellipse">
+            <a:avLst/>
+          </a:prstGeom>
+          <a:solidFill>
+            <a:srgbClr val="5C0E2E"/>
+          </a:solidFill>
+          <a:ln/>
+        </p:spPr>
+      </p:sp>
+      <p:pic>
+        <p:nvPicPr>
+          <p:cNvPr id="11" name="Image 2" descr="preencoded.png">    </p:cNvPr>
+          <p:cNvPicPr>
+            <a:picLocks noChangeAspect="1"/>
+          </p:cNvPicPr>
+          <p:nvPr/>
+        </p:nvPicPr>
+        <p:blipFill>
+          <a:blip r:embed="rId3"/>
+          <a:stretch>
+            <a:fillRect/>
+          </a:stretch>
+        </p:blipFill>
+        <p:spPr>
+          <a:xfrm>
+            <a:off x="763524" y="4512564"/>
+            <a:ext cx="301752" cy="301752"/>
+          </a:xfrm>
+          <a:prstGeom prst="rect">
+            <a:avLst/>
+          </a:prstGeom>
+        </p:spPr>
+      </p:pic>
+      <p:sp>
+        <p:nvSpPr>
+          <p:cNvPr id="12" name="Text 7"/>
+          <p:cNvSpPr/>
+          <p:nvPr/>
+        </p:nvSpPr>
+        <p:spPr>
+          <a:xfrm>
+            <a:off x="1417320" y="4370832"/>
+            <a:ext cx="9875520" cy="822960"/>
+          </a:xfrm>
+          <a:prstGeom prst="rect">
+            <a:avLst/>
+          </a:prstGeom>
+          <a:noFill/>
+          <a:ln/>
+        </p:spPr>
+        <p:txBody>
+          <a:bodyPr wrap="square" lIns="0" tIns="0" rIns="0" bIns="0" rtlCol="0" anchor="ctr"/>
+          <a:lstStyle/>
+          <a:p>
+            <a:pPr indent="0" marL="0">
+              <a:lnSpc>
+                <a:spcPct val="125000"/>
+              </a:lnSpc>
+              <a:buNone/>
+            </a:pPr>
+            <a:r>
+              <a:rPr lang="en-US" sz="1500" dirty="0">
+                <a:solidFill>
+                  <a:srgbClr val="FFFFFF"/>
                 </a:solidFill>
                 <a:latin typeface="Calibri" pitchFamily="34" charset="0"/>
                 <a:ea typeface="Calibri" pitchFamily="34" charset="-122"/>
                 <a:cs typeface="Calibri" pitchFamily="34" charset="-120"/>
               </a:rPr>
-              <a:t>1</a:t>
+              <a:t>Lesson: extensibility paid off for external, unpredictable change — but generality pursued ahead of need had a real cost.</a:t>
+            </a:r>
+            <a:endParaRPr lang="en-US" sz="1500" dirty="0"/>
+          </a:p>
+        </p:txBody>
+      </p:sp>
+      <p:pic>
+        <p:nvPicPr>
+          <p:cNvPr id="13" name="Image 3" descr="preencoded.png">    </p:cNvPr>
+          <p:cNvPicPr>
+            <a:picLocks noChangeAspect="1"/>
+          </p:cNvPicPr>
+          <p:nvPr/>
+        </p:nvPicPr>
+        <p:blipFill>
+          <a:blip r:embed="rId4"/>
+          <a:stretch>
+            <a:fillRect/>
+          </a:stretch>
+        </p:blipFill>
+        <p:spPr>
+          <a:xfrm>
+            <a:off x="10728655" y="6336792"/>
+            <a:ext cx="731520" cy="320040"/>
+          </a:xfrm>
+          <a:prstGeom prst="rect">
+            <a:avLst/>
+          </a:prstGeom>
+        </p:spPr>
+      </p:pic>
+      <p:sp>
+        <p:nvSpPr>
+          <p:cNvPr id="14" name="Text 8"/>
+          <p:cNvSpPr/>
+          <p:nvPr/>
+        </p:nvSpPr>
+        <p:spPr>
+          <a:xfrm>
+            <a:off x="11551615" y="6446520"/>
+            <a:ext cx="457200" cy="274320"/>
+          </a:xfrm>
+          <a:prstGeom prst="rect">
+            <a:avLst/>
+          </a:prstGeom>
+          <a:noFill/>
+          <a:ln/>
+        </p:spPr>
+        <p:txBody>
+          <a:bodyPr wrap="square" rtlCol="0" anchor="ctr"/>
+          <a:lstStyle/>
+          <a:p>
+            <a:pPr algn="r" indent="0" marL="0">
+              <a:buNone/>
+            </a:pPr>
+            <a:r>
+              <a:rPr lang="en-US" sz="1000" dirty="0">
+                <a:solidFill>
+                  <a:srgbClr val="6B6570"/>
+                </a:solidFill>
+                <a:latin typeface="Calibri" pitchFamily="34" charset="0"/>
+                <a:ea typeface="Calibri" pitchFamily="34" charset="-122"/>
+                <a:cs typeface="Calibri" pitchFamily="34" charset="-120"/>
+              </a:rPr>
+              <a:t>11</a:t>
             </a:r>
             <a:endParaRPr lang="en-US" sz="1000" dirty="0"/>
           </a:p>
@@ -4188,7 +3955,7 @@
       </p:sp>
       <p:sp>
         <p:nvSpPr>
-          <p:cNvPr id="15" name="Text 11"/>
+          <p:cNvPr id="15" name="Text 9"/>
           <p:cNvSpPr/>
           <p:nvPr/>
         </p:nvSpPr>
@@ -4259,452 +4026,6 @@
       </p:grpSpPr>
       <p:sp>
         <p:nvSpPr>
-          <p:cNvPr id="2" name="Text 0"/>
-          <p:cNvSpPr/>
-          <p:nvPr/>
-        </p:nvSpPr>
-        <p:spPr>
-          <a:xfrm>
-            <a:off x="548640" y="411480"/>
-            <a:ext cx="9144000" cy="320040"/>
-          </a:xfrm>
-          <a:prstGeom prst="rect">
-            <a:avLst/>
-          </a:prstGeom>
-          <a:noFill/>
-          <a:ln/>
-        </p:spPr>
-        <p:txBody>
-          <a:bodyPr wrap="square" rtlCol="0" anchor="ctr"/>
-          <a:lstStyle/>
-          <a:p>
-            <a:pPr indent="0" marL="0">
-              <a:buNone/>
-            </a:pPr>
-            <a:r>
-              <a:rPr lang="en-US" sz="1300" b="1" spc="200" kern="0" dirty="0">
-                <a:solidFill>
-                  <a:srgbClr val="0FA3A3"/>
-                </a:solidFill>
-                <a:latin typeface="Calibri" pitchFamily="34" charset="0"/>
-                <a:ea typeface="Calibri" pitchFamily="34" charset="-122"/>
-                <a:cs typeface="Calibri" pitchFamily="34" charset="-120"/>
-              </a:rPr>
-              <a:t>CONCLUSION</a:t>
-            </a:r>
-            <a:endParaRPr lang="en-US" sz="1300" dirty="0"/>
-          </a:p>
-        </p:txBody>
-      </p:sp>
-      <p:sp>
-        <p:nvSpPr>
-          <p:cNvPr id="3" name="Text 1"/>
-          <p:cNvSpPr/>
-          <p:nvPr/>
-        </p:nvSpPr>
-        <p:spPr>
-          <a:xfrm>
-            <a:off x="548640" y="713232"/>
-            <a:ext cx="10515600" cy="822960"/>
-          </a:xfrm>
-          <a:prstGeom prst="rect">
-            <a:avLst/>
-          </a:prstGeom>
-          <a:noFill/>
-          <a:ln/>
-        </p:spPr>
-        <p:txBody>
-          <a:bodyPr wrap="square" lIns="0" tIns="0" rIns="0" bIns="0" rtlCol="0" anchor="ctr"/>
-          <a:lstStyle/>
-          <a:p>
-            <a:pPr indent="0" marL="0">
-              <a:buNone/>
-            </a:pPr>
-            <a:r>
-              <a:rPr lang="en-US" sz="3200" b="1" dirty="0">
-                <a:solidFill>
-                  <a:srgbClr val="FFFFFF"/>
-                </a:solidFill>
-                <a:latin typeface="Cambria" pitchFamily="34" charset="0"/>
-                <a:ea typeface="Cambria" pitchFamily="34" charset="-122"/>
-                <a:cs typeface="Cambria" pitchFamily="34" charset="-120"/>
-              </a:rPr>
-              <a:t>Two systems, one consistent engineering approach</a:t>
-            </a:r>
-            <a:endParaRPr lang="en-US" sz="3200" dirty="0"/>
-          </a:p>
-        </p:txBody>
-      </p:sp>
-      <p:sp>
-        <p:nvSpPr>
-          <p:cNvPr id="4" name="Shape 2"/>
-          <p:cNvSpPr/>
-          <p:nvPr/>
-        </p:nvSpPr>
-        <p:spPr>
-          <a:xfrm>
-            <a:off x="640080" y="2103120"/>
-            <a:ext cx="548640" cy="548640"/>
-          </a:xfrm>
-          <a:prstGeom prst="ellipse">
-            <a:avLst/>
-          </a:prstGeom>
-          <a:solidFill>
-            <a:srgbClr val="5C0E2E"/>
-          </a:solidFill>
-          <a:ln/>
-        </p:spPr>
-      </p:sp>
-      <p:pic>
-        <p:nvPicPr>
-          <p:cNvPr id="5" name="Image 0" descr="preencoded.png">    </p:cNvPr>
-          <p:cNvPicPr>
-            <a:picLocks noChangeAspect="1"/>
-          </p:cNvPicPr>
-          <p:nvPr/>
-        </p:nvPicPr>
-        <p:blipFill>
-          <a:blip r:embed="rId1"/>
-          <a:stretch>
-            <a:fillRect/>
-          </a:stretch>
-        </p:blipFill>
-        <p:spPr>
-          <a:xfrm>
-            <a:off x="763524" y="2226564"/>
-            <a:ext cx="301752" cy="301752"/>
-          </a:xfrm>
-          <a:prstGeom prst="rect">
-            <a:avLst/>
-          </a:prstGeom>
-        </p:spPr>
-      </p:pic>
-      <p:sp>
-        <p:nvSpPr>
-          <p:cNvPr id="6" name="Text 3"/>
-          <p:cNvSpPr/>
-          <p:nvPr/>
-        </p:nvSpPr>
-        <p:spPr>
-          <a:xfrm>
-            <a:off x="1417320" y="2084832"/>
-            <a:ext cx="9875520" cy="822960"/>
-          </a:xfrm>
-          <a:prstGeom prst="rect">
-            <a:avLst/>
-          </a:prstGeom>
-          <a:noFill/>
-          <a:ln/>
-        </p:spPr>
-        <p:txBody>
-          <a:bodyPr wrap="square" lIns="0" tIns="0" rIns="0" bIns="0" rtlCol="0" anchor="ctr"/>
-          <a:lstStyle/>
-          <a:p>
-            <a:pPr indent="0" marL="0">
-              <a:lnSpc>
-                <a:spcPct val="125000"/>
-              </a:lnSpc>
-              <a:buNone/>
-            </a:pPr>
-            <a:r>
-              <a:rPr lang="en-US" sz="1500" dirty="0">
-                <a:solidFill>
-                  <a:srgbClr val="FFFFFF"/>
-                </a:solidFill>
-                <a:latin typeface="Calibri" pitchFamily="34" charset="0"/>
-                <a:ea typeface="Calibri" pitchFamily="34" charset="-122"/>
-                <a:cs typeface="Calibri" pitchFamily="34" charset="-120"/>
-              </a:rPr>
-              <a:t>SDR Control System — a clean, remotely accessible, gRPC-based abstraction over the DTAPI.</a:t>
-            </a:r>
-            <a:endParaRPr lang="en-US" sz="1500" dirty="0"/>
-          </a:p>
-        </p:txBody>
-      </p:sp>
-      <p:sp>
-        <p:nvSpPr>
-          <p:cNvPr id="7" name="Shape 4"/>
-          <p:cNvSpPr/>
-          <p:nvPr/>
-        </p:nvSpPr>
-        <p:spPr>
-          <a:xfrm>
-            <a:off x="640080" y="3246120"/>
-            <a:ext cx="548640" cy="548640"/>
-          </a:xfrm>
-          <a:prstGeom prst="ellipse">
-            <a:avLst/>
-          </a:prstGeom>
-          <a:solidFill>
-            <a:srgbClr val="5C0E2E"/>
-          </a:solidFill>
-          <a:ln/>
-        </p:spPr>
-      </p:sp>
-      <p:pic>
-        <p:nvPicPr>
-          <p:cNvPr id="8" name="Image 1" descr="preencoded.png">    </p:cNvPr>
-          <p:cNvPicPr>
-            <a:picLocks noChangeAspect="1"/>
-          </p:cNvPicPr>
-          <p:nvPr/>
-        </p:nvPicPr>
-        <p:blipFill>
-          <a:blip r:embed="rId2"/>
-          <a:stretch>
-            <a:fillRect/>
-          </a:stretch>
-        </p:blipFill>
-        <p:spPr>
-          <a:xfrm>
-            <a:off x="763524" y="3369564"/>
-            <a:ext cx="301752" cy="301752"/>
-          </a:xfrm>
-          <a:prstGeom prst="rect">
-            <a:avLst/>
-          </a:prstGeom>
-        </p:spPr>
-      </p:pic>
-      <p:sp>
-        <p:nvSpPr>
-          <p:cNvPr id="9" name="Text 5"/>
-          <p:cNvSpPr/>
-          <p:nvPr/>
-        </p:nvSpPr>
-        <p:spPr>
-          <a:xfrm>
-            <a:off x="1417320" y="3227832"/>
-            <a:ext cx="9875520" cy="822960"/>
-          </a:xfrm>
-          <a:prstGeom prst="rect">
-            <a:avLst/>
-          </a:prstGeom>
-          <a:noFill/>
-          <a:ln/>
-        </p:spPr>
-        <p:txBody>
-          <a:bodyPr wrap="square" lIns="0" tIns="0" rIns="0" bIns="0" rtlCol="0" anchor="ctr"/>
-          <a:lstStyle/>
-          <a:p>
-            <a:pPr indent="0" marL="0">
-              <a:lnSpc>
-                <a:spcPct val="125000"/>
-              </a:lnSpc>
-              <a:buNone/>
-            </a:pPr>
-            <a:r>
-              <a:rPr lang="en-US" sz="1500" dirty="0">
-                <a:solidFill>
-                  <a:srgbClr val="FFFFFF"/>
-                </a:solidFill>
-                <a:latin typeface="Calibri" pitchFamily="34" charset="0"/>
-                <a:ea typeface="Calibri" pitchFamily="34" charset="-122"/>
-                <a:cs typeface="Calibri" pitchFamily="34" charset="-120"/>
-              </a:rPr>
-              <a:t>RS-232 Interface — a lightweight, extensible protocol layer using Boost.PFR and COBS.</a:t>
-            </a:r>
-            <a:endParaRPr lang="en-US" sz="1500" dirty="0"/>
-          </a:p>
-        </p:txBody>
-      </p:sp>
-      <p:sp>
-        <p:nvSpPr>
-          <p:cNvPr id="10" name="Shape 6"/>
-          <p:cNvSpPr/>
-          <p:nvPr/>
-        </p:nvSpPr>
-        <p:spPr>
-          <a:xfrm>
-            <a:off x="640080" y="4389120"/>
-            <a:ext cx="548640" cy="548640"/>
-          </a:xfrm>
-          <a:prstGeom prst="ellipse">
-            <a:avLst/>
-          </a:prstGeom>
-          <a:solidFill>
-            <a:srgbClr val="5C0E2E"/>
-          </a:solidFill>
-          <a:ln/>
-        </p:spPr>
-      </p:sp>
-      <p:pic>
-        <p:nvPicPr>
-          <p:cNvPr id="11" name="Image 2" descr="preencoded.png">    </p:cNvPr>
-          <p:cNvPicPr>
-            <a:picLocks noChangeAspect="1"/>
-          </p:cNvPicPr>
-          <p:nvPr/>
-        </p:nvPicPr>
-        <p:blipFill>
-          <a:blip r:embed="rId3"/>
-          <a:stretch>
-            <a:fillRect/>
-          </a:stretch>
-        </p:blipFill>
-        <p:spPr>
-          <a:xfrm>
-            <a:off x="763524" y="4512564"/>
-            <a:ext cx="301752" cy="301752"/>
-          </a:xfrm>
-          <a:prstGeom prst="rect">
-            <a:avLst/>
-          </a:prstGeom>
-        </p:spPr>
-      </p:pic>
-      <p:sp>
-        <p:nvSpPr>
-          <p:cNvPr id="12" name="Text 7"/>
-          <p:cNvSpPr/>
-          <p:nvPr/>
-        </p:nvSpPr>
-        <p:spPr>
-          <a:xfrm>
-            <a:off x="1417320" y="4370832"/>
-            <a:ext cx="9875520" cy="822960"/>
-          </a:xfrm>
-          <a:prstGeom prst="rect">
-            <a:avLst/>
-          </a:prstGeom>
-          <a:noFill/>
-          <a:ln/>
-        </p:spPr>
-        <p:txBody>
-          <a:bodyPr wrap="square" lIns="0" tIns="0" rIns="0" bIns="0" rtlCol="0" anchor="ctr"/>
-          <a:lstStyle/>
-          <a:p>
-            <a:pPr indent="0" marL="0">
-              <a:lnSpc>
-                <a:spcPct val="125000"/>
-              </a:lnSpc>
-              <a:buNone/>
-            </a:pPr>
-            <a:r>
-              <a:rPr lang="en-US" sz="1500" dirty="0">
-                <a:solidFill>
-                  <a:srgbClr val="FFFFFF"/>
-                </a:solidFill>
-                <a:latin typeface="Calibri" pitchFamily="34" charset="0"/>
-                <a:ea typeface="Calibri" pitchFamily="34" charset="-122"/>
-                <a:cs typeface="Calibri" pitchFamily="34" charset="-120"/>
-              </a:rPr>
-              <a:t>Lesson: extensibility paid off for external, unpredictable change — but generality pursued ahead of need had a real cost.</a:t>
-            </a:r>
-            <a:endParaRPr lang="en-US" sz="1500" dirty="0"/>
-          </a:p>
-        </p:txBody>
-      </p:sp>
-      <p:sp>
-        <p:nvSpPr>
-          <p:cNvPr id="13" name="Text 8"/>
-          <p:cNvSpPr/>
-          <p:nvPr/>
-        </p:nvSpPr>
-        <p:spPr>
-          <a:xfrm>
-            <a:off x="11551615" y="6446520"/>
-            <a:ext cx="457200" cy="274320"/>
-          </a:xfrm>
-          <a:prstGeom prst="rect">
-            <a:avLst/>
-          </a:prstGeom>
-          <a:noFill/>
-          <a:ln/>
-        </p:spPr>
-        <p:txBody>
-          <a:bodyPr wrap="square" rtlCol="0" anchor="ctr"/>
-          <a:lstStyle/>
-          <a:p>
-            <a:pPr algn="r" indent="0" marL="0">
-              <a:buNone/>
-            </a:pPr>
-            <a:r>
-              <a:rPr lang="en-US" sz="1000" dirty="0">
-                <a:solidFill>
-                  <a:srgbClr val="6B6570"/>
-                </a:solidFill>
-                <a:latin typeface="Calibri" pitchFamily="34" charset="0"/>
-                <a:ea typeface="Calibri" pitchFamily="34" charset="-122"/>
-                <a:cs typeface="Calibri" pitchFamily="34" charset="-120"/>
-              </a:rPr>
-              <a:t>1</a:t>
-            </a:r>
-            <a:endParaRPr lang="en-US" sz="1000" dirty="0"/>
-          </a:p>
-        </p:txBody>
-      </p:sp>
-      <p:sp>
-        <p:nvSpPr>
-          <p:cNvPr id="14" name="Text 9"/>
-          <p:cNvSpPr/>
-          <p:nvPr/>
-        </p:nvSpPr>
-        <p:spPr>
-          <a:xfrm>
-            <a:off x="457200" y="6446520"/>
-            <a:ext cx="4572000" cy="274320"/>
-          </a:xfrm>
-          <a:prstGeom prst="rect">
-            <a:avLst/>
-          </a:prstGeom>
-          <a:noFill/>
-          <a:ln/>
-        </p:spPr>
-        <p:txBody>
-          <a:bodyPr wrap="square" rtlCol="0" anchor="ctr"/>
-          <a:lstStyle/>
-          <a:p>
-            <a:pPr algn="l" indent="0" marL="0">
-              <a:buNone/>
-            </a:pPr>
-            <a:r>
-              <a:rPr lang="en-US" sz="1000" dirty="0">
-                <a:solidFill>
-                  <a:srgbClr val="6B6570"/>
-                </a:solidFill>
-                <a:latin typeface="Calibri" pitchFamily="34" charset="0"/>
-                <a:ea typeface="Calibri" pitchFamily="34" charset="-122"/>
-                <a:cs typeface="Calibri" pitchFamily="34" charset="-120"/>
-              </a:rPr>
-              <a:t>GMV — SDR Control &amp; RS-232 Interface</a:t>
-            </a:r>
-            <a:endParaRPr lang="en-US" sz="1000" dirty="0"/>
-          </a:p>
-        </p:txBody>
-      </p:sp>
-    </p:spTree>
-  </p:cSld>
-  <p:clrMapOvr>
-    <a:masterClrMapping/>
-  </p:clrMapOvr>
-</p:sld>
-</file>
-
-<file path=ppt/slides/slide14.xml><?xml version="1.0" encoding="utf-8"?>
-<p:sld xmlns:a="http://schemas.openxmlformats.org/drawingml/2006/main" xmlns:r="http://schemas.openxmlformats.org/officeDocument/2006/relationships" xmlns:p="http://schemas.openxmlformats.org/presentationml/2006/main">
-  <p:cSld name="Slide 14">
-    <p:bg>
-      <p:bgPr>
-        <a:solidFill>
-          <a:srgbClr val="3D0920"/>
-        </a:solidFill>
-      </p:bgPr>
-    </p:bg>
-    <p:spTree>
-      <p:nvGrpSpPr>
-        <p:cNvPr id="1" name=""/>
-        <p:cNvGrpSpPr/>
-        <p:nvPr/>
-      </p:nvGrpSpPr>
-      <p:grpSpPr>
-        <a:xfrm>
-          <a:off x="0" y="0"/>
-          <a:ext cx="0" cy="0"/>
-          <a:chOff x="0" y="0"/>
-          <a:chExt cx="0" cy="0"/>
-        </a:xfrm>
-      </p:grpSpPr>
-      <p:sp>
-        <p:nvSpPr>
           <p:cNvPr id="2" name="Shape 0"/>
           <p:cNvSpPr/>
           <p:nvPr/>
@@ -5397,9 +4718,33 @@
           </a:p>
         </p:txBody>
       </p:sp>
-      <p:sp>
-        <p:nvSpPr>
-          <p:cNvPr id="19" name="Text 14"/>
+      <p:pic>
+        <p:nvPicPr>
+          <p:cNvPr id="19" name="Image 3" descr="preencoded.png">    </p:cNvPr>
+          <p:cNvPicPr>
+            <a:picLocks noChangeAspect="1"/>
+          </p:cNvPicPr>
+          <p:nvPr/>
+        </p:nvPicPr>
+        <p:blipFill>
+          <a:blip r:embed="rId4"/>
+          <a:stretch>
+            <a:fillRect/>
+          </a:stretch>
+        </p:blipFill>
+        <p:spPr>
+          <a:xfrm>
+            <a:off x="10728655" y="6336792"/>
+            <a:ext cx="731520" cy="320040"/>
+          </a:xfrm>
+          <a:prstGeom prst="rect">
+            <a:avLst/>
+          </a:prstGeom>
+        </p:spPr>
+      </p:pic>
+      <p:sp>
+        <p:nvSpPr>
+          <p:cNvPr id="20" name="Text 14"/>
           <p:cNvSpPr/>
           <p:nvPr/>
         </p:nvSpPr>
@@ -5438,7 +4783,7 @@
       </p:sp>
       <p:sp>
         <p:nvSpPr>
-          <p:cNvPr id="20" name="Text 15"/>
+          <p:cNvPr id="21" name="Text 15"/>
           <p:cNvSpPr/>
           <p:nvPr/>
         </p:nvSpPr>
@@ -5960,9 +5305,33 @@
           </a:p>
         </p:txBody>
       </p:sp>
-      <p:sp>
-        <p:nvSpPr>
-          <p:cNvPr id="16" name="Text 11"/>
+      <p:pic>
+        <p:nvPicPr>
+          <p:cNvPr id="16" name="Image 3" descr="preencoded.png">    </p:cNvPr>
+          <p:cNvPicPr>
+            <a:picLocks noChangeAspect="1"/>
+          </p:cNvPicPr>
+          <p:nvPr/>
+        </p:nvPicPr>
+        <p:blipFill>
+          <a:blip r:embed="rId4"/>
+          <a:stretch>
+            <a:fillRect/>
+          </a:stretch>
+        </p:blipFill>
+        <p:spPr>
+          <a:xfrm>
+            <a:off x="10728655" y="6336792"/>
+            <a:ext cx="731520" cy="320040"/>
+          </a:xfrm>
+          <a:prstGeom prst="rect">
+            <a:avLst/>
+          </a:prstGeom>
+        </p:spPr>
+      </p:pic>
+      <p:sp>
+        <p:nvSpPr>
+          <p:cNvPr id="17" name="Text 11"/>
           <p:cNvSpPr/>
           <p:nvPr/>
         </p:nvSpPr>
@@ -5993,7 +5362,7 @@
                 <a:ea typeface="Calibri" pitchFamily="34" charset="-122"/>
                 <a:cs typeface="Calibri" pitchFamily="34" charset="-120"/>
               </a:rPr>
-              <a:t>1</a:t>
+              <a:t>2</a:t>
             </a:r>
             <a:endParaRPr lang="en-US" sz="1000" dirty="0"/>
           </a:p>
@@ -6001,7 +5370,7 @@
       </p:sp>
       <p:sp>
         <p:nvSpPr>
-          <p:cNvPr id="17" name="Text 12"/>
+          <p:cNvPr id="18" name="Text 12"/>
           <p:cNvSpPr/>
           <p:nvPr/>
         </p:nvSpPr>
@@ -6706,9 +6075,33 @@
           </a:p>
         </p:txBody>
       </p:sp>
-      <p:sp>
-        <p:nvSpPr>
-          <p:cNvPr id="22" name="Text 17"/>
+      <p:pic>
+        <p:nvPicPr>
+          <p:cNvPr id="22" name="Image 3" descr="preencoded.png">    </p:cNvPr>
+          <p:cNvPicPr>
+            <a:picLocks noChangeAspect="1"/>
+          </p:cNvPicPr>
+          <p:nvPr/>
+        </p:nvPicPr>
+        <p:blipFill>
+          <a:blip r:embed="rId4"/>
+          <a:stretch>
+            <a:fillRect/>
+          </a:stretch>
+        </p:blipFill>
+        <p:spPr>
+          <a:xfrm>
+            <a:off x="10728655" y="6336792"/>
+            <a:ext cx="731520" cy="320040"/>
+          </a:xfrm>
+          <a:prstGeom prst="rect">
+            <a:avLst/>
+          </a:prstGeom>
+        </p:spPr>
+      </p:pic>
+      <p:sp>
+        <p:nvSpPr>
+          <p:cNvPr id="23" name="Text 17"/>
           <p:cNvSpPr/>
           <p:nvPr/>
         </p:nvSpPr>
@@ -6739,7 +6132,7 @@
                 <a:ea typeface="Calibri" pitchFamily="34" charset="-122"/>
                 <a:cs typeface="Calibri" pitchFamily="34" charset="-120"/>
               </a:rPr>
-              <a:t>1</a:t>
+              <a:t>3</a:t>
             </a:r>
             <a:endParaRPr lang="en-US" sz="1000" dirty="0"/>
           </a:p>
@@ -6747,7 +6140,7 @@
       </p:sp>
       <p:sp>
         <p:nvSpPr>
-          <p:cNvPr id="23" name="Text 18"/>
+          <p:cNvPr id="24" name="Text 18"/>
           <p:cNvSpPr/>
           <p:nvPr/>
         </p:nvSpPr>
@@ -7188,9 +6581,33 @@
           </a:p>
         </p:txBody>
       </p:sp>
-      <p:sp>
-        <p:nvSpPr>
-          <p:cNvPr id="14" name="Text 10"/>
+      <p:pic>
+        <p:nvPicPr>
+          <p:cNvPr id="14" name="Image 2" descr="preencoded.png">    </p:cNvPr>
+          <p:cNvPicPr>
+            <a:picLocks noChangeAspect="1"/>
+          </p:cNvPicPr>
+          <p:nvPr/>
+        </p:nvPicPr>
+        <p:blipFill>
+          <a:blip r:embed="rId3"/>
+          <a:stretch>
+            <a:fillRect/>
+          </a:stretch>
+        </p:blipFill>
+        <p:spPr>
+          <a:xfrm>
+            <a:off x="10728655" y="6336792"/>
+            <a:ext cx="731520" cy="320040"/>
+          </a:xfrm>
+          <a:prstGeom prst="rect">
+            <a:avLst/>
+          </a:prstGeom>
+        </p:spPr>
+      </p:pic>
+      <p:sp>
+        <p:nvSpPr>
+          <p:cNvPr id="15" name="Text 10"/>
           <p:cNvSpPr/>
           <p:nvPr/>
         </p:nvSpPr>
@@ -7221,7 +6638,7 @@
                 <a:ea typeface="Calibri" pitchFamily="34" charset="-122"/>
                 <a:cs typeface="Calibri" pitchFamily="34" charset="-120"/>
               </a:rPr>
-              <a:t>1</a:t>
+              <a:t>4</a:t>
             </a:r>
             <a:endParaRPr lang="en-US" sz="1000" dirty="0"/>
           </a:p>
@@ -7229,7 +6646,7 @@
       </p:sp>
       <p:sp>
         <p:nvSpPr>
-          <p:cNvPr id="15" name="Text 11"/>
+          <p:cNvPr id="16" name="Text 11"/>
           <p:cNvSpPr/>
           <p:nvPr/>
         </p:nvSpPr>
@@ -8199,9 +7616,33 @@
           </a:p>
         </p:txBody>
       </p:sp>
-      <p:sp>
-        <p:nvSpPr>
-          <p:cNvPr id="27" name="Text 25"/>
+      <p:pic>
+        <p:nvPicPr>
+          <p:cNvPr id="27" name="Image 0" descr="preencoded.png">    </p:cNvPr>
+          <p:cNvPicPr>
+            <a:picLocks noChangeAspect="1"/>
+          </p:cNvPicPr>
+          <p:nvPr/>
+        </p:nvPicPr>
+        <p:blipFill>
+          <a:blip r:embed="rId1"/>
+          <a:stretch>
+            <a:fillRect/>
+          </a:stretch>
+        </p:blipFill>
+        <p:spPr>
+          <a:xfrm>
+            <a:off x="10728655" y="6336792"/>
+            <a:ext cx="731520" cy="320040"/>
+          </a:xfrm>
+          <a:prstGeom prst="rect">
+            <a:avLst/>
+          </a:prstGeom>
+        </p:spPr>
+      </p:pic>
+      <p:sp>
+        <p:nvSpPr>
+          <p:cNvPr id="28" name="Text 25"/>
           <p:cNvSpPr/>
           <p:nvPr/>
         </p:nvSpPr>
@@ -8232,7 +7673,7 @@
                 <a:ea typeface="Calibri" pitchFamily="34" charset="-122"/>
                 <a:cs typeface="Calibri" pitchFamily="34" charset="-120"/>
               </a:rPr>
-              <a:t>1</a:t>
+              <a:t>5</a:t>
             </a:r>
             <a:endParaRPr lang="en-US" sz="1000" dirty="0"/>
           </a:p>
@@ -8240,7 +7681,7 @@
       </p:sp>
       <p:sp>
         <p:nvSpPr>
-          <p:cNvPr id="28" name="Text 26"/>
+          <p:cNvPr id="29" name="Text 26"/>
           <p:cNvSpPr/>
           <p:nvPr/>
         </p:nvSpPr>
@@ -8849,9 +8290,33 @@
           </a:p>
         </p:txBody>
       </p:sp>
-      <p:sp>
-        <p:nvSpPr>
-          <p:cNvPr id="19" name="Text 14"/>
+      <p:pic>
+        <p:nvPicPr>
+          <p:cNvPr id="19" name="Image 3" descr="preencoded.png">    </p:cNvPr>
+          <p:cNvPicPr>
+            <a:picLocks noChangeAspect="1"/>
+          </p:cNvPicPr>
+          <p:nvPr/>
+        </p:nvPicPr>
+        <p:blipFill>
+          <a:blip r:embed="rId4"/>
+          <a:stretch>
+            <a:fillRect/>
+          </a:stretch>
+        </p:blipFill>
+        <p:spPr>
+          <a:xfrm>
+            <a:off x="10728655" y="6336792"/>
+            <a:ext cx="731520" cy="320040"/>
+          </a:xfrm>
+          <a:prstGeom prst="rect">
+            <a:avLst/>
+          </a:prstGeom>
+        </p:spPr>
+      </p:pic>
+      <p:sp>
+        <p:nvSpPr>
+          <p:cNvPr id="20" name="Text 14"/>
           <p:cNvSpPr/>
           <p:nvPr/>
         </p:nvSpPr>
@@ -8882,7 +8347,7 @@
                 <a:ea typeface="Calibri" pitchFamily="34" charset="-122"/>
                 <a:cs typeface="Calibri" pitchFamily="34" charset="-120"/>
               </a:rPr>
-              <a:t>1</a:t>
+              <a:t>6</a:t>
             </a:r>
             <a:endParaRPr lang="en-US" sz="1000" dirty="0"/>
           </a:p>
@@ -8890,7 +8355,7 @@
       </p:sp>
       <p:sp>
         <p:nvSpPr>
-          <p:cNvPr id="20" name="Text 15"/>
+          <p:cNvPr id="21" name="Text 15"/>
           <p:cNvSpPr/>
           <p:nvPr/>
         </p:nvSpPr>
@@ -9059,9 +8524,33 @@
           <a:ln/>
         </p:spPr>
       </p:sp>
-      <p:sp>
-        <p:nvSpPr>
-          <p:cNvPr id="5" name="Text 3"/>
+      <p:pic>
+        <p:nvPicPr>
+          <p:cNvPr id="5" name="Image 0" descr="preencoded.png">    </p:cNvPr>
+          <p:cNvPicPr>
+            <a:picLocks noChangeAspect="1"/>
+          </p:cNvPicPr>
+          <p:nvPr/>
+        </p:nvPicPr>
+        <p:blipFill>
+          <a:blip r:embed="rId1"/>
+          <a:stretch>
+            <a:fillRect/>
+          </a:stretch>
+        </p:blipFill>
+        <p:spPr>
+          <a:xfrm>
+            <a:off x="10728655" y="6336792"/>
+            <a:ext cx="731520" cy="320040"/>
+          </a:xfrm>
+          <a:prstGeom prst="rect">
+            <a:avLst/>
+          </a:prstGeom>
+        </p:spPr>
+      </p:pic>
+      <p:sp>
+        <p:nvSpPr>
+          <p:cNvPr id="6" name="Text 3"/>
           <p:cNvSpPr/>
           <p:nvPr/>
         </p:nvSpPr>
@@ -9092,7 +8581,7 @@
                 <a:ea typeface="Calibri" pitchFamily="34" charset="-122"/>
                 <a:cs typeface="Calibri" pitchFamily="34" charset="-120"/>
               </a:rPr>
-              <a:t>1</a:t>
+              <a:t>7</a:t>
             </a:r>
             <a:endParaRPr lang="en-US" sz="1000" dirty="0"/>
           </a:p>
@@ -9100,7 +8589,7 @@
       </p:sp>
       <p:sp>
         <p:nvSpPr>
-          <p:cNvPr id="6" name="Text 4"/>
+          <p:cNvPr id="7" name="Text 4"/>
           <p:cNvSpPr/>
           <p:nvPr/>
         </p:nvSpPr>
@@ -9922,9 +9411,33 @@
           </a:p>
         </p:txBody>
       </p:sp>
-      <p:sp>
-        <p:nvSpPr>
-          <p:cNvPr id="23" name="Text 21"/>
+      <p:pic>
+        <p:nvPicPr>
+          <p:cNvPr id="23" name="Image 0" descr="preencoded.png">    </p:cNvPr>
+          <p:cNvPicPr>
+            <a:picLocks noChangeAspect="1"/>
+          </p:cNvPicPr>
+          <p:nvPr/>
+        </p:nvPicPr>
+        <p:blipFill>
+          <a:blip r:embed="rId1"/>
+          <a:stretch>
+            <a:fillRect/>
+          </a:stretch>
+        </p:blipFill>
+        <p:spPr>
+          <a:xfrm>
+            <a:off x="10728655" y="6336792"/>
+            <a:ext cx="731520" cy="320040"/>
+          </a:xfrm>
+          <a:prstGeom prst="rect">
+            <a:avLst/>
+          </a:prstGeom>
+        </p:spPr>
+      </p:pic>
+      <p:sp>
+        <p:nvSpPr>
+          <p:cNvPr id="24" name="Text 21"/>
           <p:cNvSpPr/>
           <p:nvPr/>
         </p:nvSpPr>
@@ -9955,7 +9468,7 @@
                 <a:ea typeface="Calibri" pitchFamily="34" charset="-122"/>
                 <a:cs typeface="Calibri" pitchFamily="34" charset="-120"/>
               </a:rPr>
-              <a:t>1</a:t>
+              <a:t>8</a:t>
             </a:r>
             <a:endParaRPr lang="en-US" sz="1000" dirty="0"/>
           </a:p>
@@ -9963,7 +9476,7 @@
       </p:sp>
       <p:sp>
         <p:nvSpPr>
-          <p:cNvPr id="24" name="Text 22"/>
+          <p:cNvPr id="25" name="Text 22"/>
           <p:cNvSpPr/>
           <p:nvPr/>
         </p:nvSpPr>

--- a/Internship_Defense.pptx
+++ b/Internship_Defense.pptx
@@ -2356,7 +2356,7 @@
                 <a:ea typeface="Calibri" pitchFamily="34" charset="-122"/>
                 <a:cs typeface="Calibri" pitchFamily="34" charset="-120"/>
               </a:rPr>
-              <a:t>INTEGRATION &amp; TESTING</a:t>
+              <a:t>TESTING</a:t>
             </a:r>
             <a:endParaRPr lang="en-US" sz="1300" dirty="0"/>
           </a:p>
@@ -2395,7 +2395,7 @@
                 <a:ea typeface="Cambria" pitchFamily="34" charset="-122"/>
                 <a:cs typeface="Cambria" pitchFamily="34" charset="-120"/>
               </a:rPr>
-              <a:t>Validated against real hardware</a:t>
+              <a:t>External tester and unit tests</a:t>
             </a:r>
             <a:endParaRPr lang="en-US" sz="3200" dirty="0"/>
           </a:p>
@@ -2601,7 +2601,7 @@
                 <a:ea typeface="Calibri" pitchFamily="34" charset="-122"/>
                 <a:cs typeface="Calibri" pitchFamily="34" charset="-120"/>
               </a:rPr>
-              <a:t>Test 1 — Power configuration (Rohde &amp; Schwarz NRQ6)</a:t>
+              <a:t>Exercises the serial link, IP transport and gRPC path end-to-end.</a:t>
             </a:r>
             <a:endParaRPr lang="en-US" sz="1250" dirty="0"/>
           </a:p>
@@ -2660,7 +2660,7 @@
                 <a:ea typeface="Calibri" pitchFamily="34" charset="-122"/>
                 <a:cs typeface="Calibri" pitchFamily="34" charset="-120"/>
               </a:rPr>
-              <a:t>Test 2 — Frequency configuration (frequency counter)</a:t>
+              <a:t>Useful for validating the integrated behaviour of the whole path.</a:t>
             </a:r>
             <a:endParaRPr lang="en-US" sz="1250" dirty="0"/>
           </a:p>
@@ -2719,7 +2719,7 @@
                 <a:ea typeface="Calibri" pitchFamily="34" charset="-122"/>
                 <a:cs typeface="Calibri" pitchFamily="34" charset="-120"/>
               </a:rPr>
-              <a:t>Test 3 — Signal recording (Ettus USRP X310)</a:t>
+              <a:t>Covers the full path in a realistic setup before deployment.</a:t>
             </a:r>
             <a:endParaRPr lang="en-US" sz="1250" dirty="0"/>
           </a:p>
@@ -2824,7 +2824,7 @@
                 <a:ea typeface="Cambria" pitchFamily="34" charset="-122"/>
                 <a:cs typeface="Cambria" pitchFamily="34" charset="-120"/>
               </a:rPr>
-              <a:t>Adopted integration path</a:t>
+              <a:t>Unit tests</a:t>
             </a:r>
             <a:endParaRPr lang="en-US" sz="1600" dirty="0"/>
           </a:p>
@@ -2866,7 +2866,7 @@
                 <a:ea typeface="Calibri" pitchFamily="34" charset="-122"/>
                 <a:cs typeface="Calibri" pitchFamily="34" charset="-120"/>
               </a:rPr>
-              <a:t>Rather than maintain a bespoke application protocol over the serial link, the final system establishes PPP over RS-232 and reuses the existing gRPC client-server interface over the resulting IP channel.</a:t>
+              <a:t>Verify smaller pieces of logic in isolation, making regressions easier to catch and debug during development.</a:t>
             </a:r>
             <a:endParaRPr lang="en-US" sz="1300" dirty="0"/>
           </a:p>
@@ -2908,7 +2908,7 @@
                 <a:ea typeface="Calibri" pitchFamily="34" charset="-122"/>
                 <a:cs typeface="Calibri" pitchFamily="34" charset="-120"/>
               </a:rPr>
-              <a:t>This keeps the control surface transport-agnostic: once the lower layer looks like a network link, the higher layers remain unchanged.</a:t>
+              <a:t>Together with the external tester, they provide both component-level confidence and end-to-end validation.</a:t>
             </a:r>
             <a:endParaRPr lang="en-US" sz="1250" dirty="0"/>
           </a:p>

--- a/Internship_Defense.pptx
+++ b/Internship_Defense.pptx
@@ -2550,34 +2550,14 @@
       </p:sp>
       <p:sp>
         <p:nvSpPr>
-          <p:cNvPr id="9" name="Shape 6"/>
-          <p:cNvSpPr/>
-          <p:nvPr/>
-        </p:nvSpPr>
-        <p:spPr>
-          <a:xfrm>
-            <a:off x="960120" y="4078224"/>
-            <a:ext cx="109728" cy="109728"/>
-          </a:xfrm>
-          <a:prstGeom prst="ellipse">
-            <a:avLst/>
-          </a:prstGeom>
-          <a:solidFill>
-            <a:srgbClr val="0FA3A3"/>
-          </a:solidFill>
-          <a:ln/>
-        </p:spPr>
-      </p:sp>
-      <p:sp>
-        <p:nvSpPr>
-          <p:cNvPr id="10" name="Text 7"/>
-          <p:cNvSpPr/>
-          <p:nvPr/>
-        </p:nvSpPr>
-        <p:spPr>
-          <a:xfrm>
-            <a:off x="1188720" y="3931920"/>
-            <a:ext cx="4389120" cy="365760"/>
+          <p:cNvPr id="9" name="Text 6"/>
+          <p:cNvSpPr/>
+          <p:nvPr/>
+        </p:nvSpPr>
+        <p:spPr>
+          <a:xfrm>
+            <a:off x="960120" y="4069080"/>
+            <a:ext cx="4572000" cy="914400"/>
           </a:xfrm>
           <a:prstGeom prst="rect">
             <a:avLst/>
@@ -2590,10 +2570,13 @@
           <a:lstStyle/>
           <a:p>
             <a:pPr indent="0" marL="0">
-              <a:buNone/>
-            </a:pPr>
-            <a:r>
-              <a:rPr lang="en-US" sz="1250" dirty="0">
+              <a:lnSpc>
+                <a:spcPct val="120000"/>
+              </a:lnSpc>
+              <a:buNone/>
+            </a:pPr>
+            <a:r>
+              <a:rPr lang="en-US" sz="1250" i="1" dirty="0">
                 <a:solidFill>
                   <a:srgbClr val="2B2730"/>
                 </a:solidFill>
@@ -2601,7 +2584,7 @@
                 <a:ea typeface="Calibri" pitchFamily="34" charset="-122"/>
                 <a:cs typeface="Calibri" pitchFamily="34" charset="-120"/>
               </a:rPr>
-              <a:t>Exercises the serial link, IP transport and gRPC path end-to-end.</a:t>
+              <a:t>Covers the full path in a realistic setup, so integration problems appear before deployment.</a:t>
             </a:r>
             <a:endParaRPr lang="en-US" sz="1250" dirty="0"/>
           </a:p>
@@ -2609,125 +2592,7 @@
       </p:sp>
       <p:sp>
         <p:nvSpPr>
-          <p:cNvPr id="11" name="Shape 8"/>
-          <p:cNvSpPr/>
-          <p:nvPr/>
-        </p:nvSpPr>
-        <p:spPr>
-          <a:xfrm>
-            <a:off x="960120" y="4581144"/>
-            <a:ext cx="109728" cy="109728"/>
-          </a:xfrm>
-          <a:prstGeom prst="ellipse">
-            <a:avLst/>
-          </a:prstGeom>
-          <a:solidFill>
-            <a:srgbClr val="0FA3A3"/>
-          </a:solidFill>
-          <a:ln/>
-        </p:spPr>
-      </p:sp>
-      <p:sp>
-        <p:nvSpPr>
-          <p:cNvPr id="12" name="Text 9"/>
-          <p:cNvSpPr/>
-          <p:nvPr/>
-        </p:nvSpPr>
-        <p:spPr>
-          <a:xfrm>
-            <a:off x="1188720" y="4434840"/>
-            <a:ext cx="4389120" cy="365760"/>
-          </a:xfrm>
-          <a:prstGeom prst="rect">
-            <a:avLst/>
-          </a:prstGeom>
-          <a:noFill/>
-          <a:ln/>
-        </p:spPr>
-        <p:txBody>
-          <a:bodyPr wrap="square" lIns="0" tIns="0" rIns="0" bIns="0" rtlCol="0" anchor="ctr"/>
-          <a:lstStyle/>
-          <a:p>
-            <a:pPr indent="0" marL="0">
-              <a:buNone/>
-            </a:pPr>
-            <a:r>
-              <a:rPr lang="en-US" sz="1250" dirty="0">
-                <a:solidFill>
-                  <a:srgbClr val="2B2730"/>
-                </a:solidFill>
-                <a:latin typeface="Calibri" pitchFamily="34" charset="0"/>
-                <a:ea typeface="Calibri" pitchFamily="34" charset="-122"/>
-                <a:cs typeface="Calibri" pitchFamily="34" charset="-120"/>
-              </a:rPr>
-              <a:t>Useful for validating the integrated behaviour of the whole path.</a:t>
-            </a:r>
-            <a:endParaRPr lang="en-US" sz="1250" dirty="0"/>
-          </a:p>
-        </p:txBody>
-      </p:sp>
-      <p:sp>
-        <p:nvSpPr>
-          <p:cNvPr id="13" name="Shape 10"/>
-          <p:cNvSpPr/>
-          <p:nvPr/>
-        </p:nvSpPr>
-        <p:spPr>
-          <a:xfrm>
-            <a:off x="960120" y="5084064"/>
-            <a:ext cx="109728" cy="109728"/>
-          </a:xfrm>
-          <a:prstGeom prst="ellipse">
-            <a:avLst/>
-          </a:prstGeom>
-          <a:solidFill>
-            <a:srgbClr val="0FA3A3"/>
-          </a:solidFill>
-          <a:ln/>
-        </p:spPr>
-      </p:sp>
-      <p:sp>
-        <p:nvSpPr>
-          <p:cNvPr id="14" name="Text 11"/>
-          <p:cNvSpPr/>
-          <p:nvPr/>
-        </p:nvSpPr>
-        <p:spPr>
-          <a:xfrm>
-            <a:off x="1188720" y="4937760"/>
-            <a:ext cx="4389120" cy="365760"/>
-          </a:xfrm>
-          <a:prstGeom prst="rect">
-            <a:avLst/>
-          </a:prstGeom>
-          <a:noFill/>
-          <a:ln/>
-        </p:spPr>
-        <p:txBody>
-          <a:bodyPr wrap="square" lIns="0" tIns="0" rIns="0" bIns="0" rtlCol="0" anchor="ctr"/>
-          <a:lstStyle/>
-          <a:p>
-            <a:pPr indent="0" marL="0">
-              <a:buNone/>
-            </a:pPr>
-            <a:r>
-              <a:rPr lang="en-US" sz="1250" dirty="0">
-                <a:solidFill>
-                  <a:srgbClr val="2B2730"/>
-                </a:solidFill>
-                <a:latin typeface="Calibri" pitchFamily="34" charset="0"/>
-                <a:ea typeface="Calibri" pitchFamily="34" charset="-122"/>
-                <a:cs typeface="Calibri" pitchFamily="34" charset="-120"/>
-              </a:rPr>
-              <a:t>Covers the full path in a realistic setup before deployment.</a:t>
-            </a:r>
-            <a:endParaRPr lang="en-US" sz="1250" dirty="0"/>
-          </a:p>
-        </p:txBody>
-      </p:sp>
-      <p:sp>
-        <p:nvSpPr>
-          <p:cNvPr id="15" name="Shape 12"/>
+          <p:cNvPr id="10" name="Shape 7"/>
           <p:cNvSpPr/>
           <p:nvPr/>
         </p:nvSpPr>
@@ -2749,7 +2614,7 @@
       </p:sp>
       <p:sp>
         <p:nvSpPr>
-          <p:cNvPr id="16" name="Shape 13"/>
+          <p:cNvPr id="11" name="Shape 8"/>
           <p:cNvSpPr/>
           <p:nvPr/>
         </p:nvSpPr>
@@ -2769,7 +2634,7 @@
       </p:sp>
       <p:pic>
         <p:nvPicPr>
-          <p:cNvPr id="17" name="Image 1" descr="preencoded.png">    </p:cNvPr>
+          <p:cNvPr id="12" name="Image 1" descr="preencoded.png">    </p:cNvPr>
           <p:cNvPicPr>
             <a:picLocks noChangeAspect="1"/>
           </p:cNvPicPr>
@@ -2793,7 +2658,7 @@
       </p:pic>
       <p:sp>
         <p:nvSpPr>
-          <p:cNvPr id="18" name="Text 14"/>
+          <p:cNvPr id="13" name="Text 9"/>
           <p:cNvSpPr/>
           <p:nvPr/>
         </p:nvSpPr>
@@ -2832,14 +2697,14 @@
       </p:sp>
       <p:sp>
         <p:nvSpPr>
-          <p:cNvPr id="19" name="Text 15"/>
+          <p:cNvPr id="14" name="Text 10"/>
           <p:cNvSpPr/>
           <p:nvPr/>
         </p:nvSpPr>
         <p:spPr>
           <a:xfrm>
             <a:off x="6355080" y="2926080"/>
-            <a:ext cx="4937760" cy="1280160"/>
+            <a:ext cx="4937760" cy="1005840"/>
           </a:xfrm>
           <a:prstGeom prst="rect">
             <a:avLst/>
@@ -2874,13 +2739,13 @@
       </p:sp>
       <p:sp>
         <p:nvSpPr>
-          <p:cNvPr id="20" name="Text 16"/>
-          <p:cNvSpPr/>
-          <p:nvPr/>
-        </p:nvSpPr>
-        <p:spPr>
-          <a:xfrm>
-            <a:off x="6355080" y="4389120"/>
+          <p:cNvPr id="15" name="Text 11"/>
+          <p:cNvSpPr/>
+          <p:nvPr/>
+        </p:nvSpPr>
+        <p:spPr>
+          <a:xfrm>
+            <a:off x="6355080" y="4297680"/>
             <a:ext cx="4937760" cy="1188720"/>
           </a:xfrm>
           <a:prstGeom prst="rect">
@@ -2916,7 +2781,7 @@
       </p:sp>
       <p:pic>
         <p:nvPicPr>
-          <p:cNvPr id="21" name="Image 2" descr="preencoded.png">    </p:cNvPr>
+          <p:cNvPr id="16" name="Image 2" descr="preencoded.png">    </p:cNvPr>
           <p:cNvPicPr>
             <a:picLocks noChangeAspect="1"/>
           </p:cNvPicPr>
@@ -2940,7 +2805,7 @@
       </p:pic>
       <p:sp>
         <p:nvSpPr>
-          <p:cNvPr id="22" name="Text 17"/>
+          <p:cNvPr id="17" name="Text 12"/>
           <p:cNvSpPr/>
           <p:nvPr/>
         </p:nvSpPr>
@@ -2979,7 +2844,7 @@
       </p:sp>
       <p:sp>
         <p:nvSpPr>
-          <p:cNvPr id="23" name="Text 18"/>
+          <p:cNvPr id="18" name="Text 13"/>
           <p:cNvSpPr/>
           <p:nvPr/>
         </p:nvSpPr>
